--- a/docs/TokenTrail_Project_Outline_Slides.pptx
+++ b/docs/TokenTrail_Project_Outline_Slides.pptx
@@ -3854,7 +3854,7 @@
                 </a:solidFill>
                 <a:latin typeface="Arial"/>
               </a:rPr>
-              <a:t>It lives inside the game.  </a:t>
+              <a:t>It lives on the home screen.  </a:t>
             </a:r>
             <a:r>
               <a:rPr sz="1250" b="0" i="0">
@@ -3863,7 +3863,7 @@
                 </a:solidFill>
                 <a:latin typeface="Arial"/>
               </a:rPr>
-              <a:t>An expandable question panel, one tap from the home screen. It reads two sources: your logged usage and recent forum posts.</a:t>
+              <a:t>An expandable question panel on the analytics dashboard, where the figures it reasons about already are. It reads two sources: your logged usage and recent forum posts.</a:t>
             </a:r>
           </a:p>
           <a:p>
@@ -4282,7 +4282,7 @@
                 </a:solidFill>
                 <a:latin typeface="Arial"/>
               </a:rPr>
-              <a:t>One path from logs to game, and the four data aspects</a:t>
+              <a:t>One path from logs to the app, and the four data aspects</a:t>
             </a:r>
           </a:p>
         </p:txBody>
@@ -4636,7 +4636,7 @@
                 </a:solidFill>
                 <a:latin typeface="Arial"/>
               </a:rPr>
-              <a:t>The game, cards, heatmap, sessions, budget alerts and the forum, with explicit unavailable states.</a:t>
+              <a:t>Cost cards, heatmap, sessions, budget alerts and the advice agent, plus the game and forum, with explicit unavailable states.</a:t>
             </a:r>
           </a:p>
         </p:txBody>
@@ -4984,7 +4984,7 @@
                 </a:solidFill>
                 <a:latin typeface="Arial"/>
               </a:rPr>
-              <a:t>Three screens, with the game as the entry point</a:t>
+              <a:t>Three screens, opening on the analytics dashboard</a:t>
             </a:r>
           </a:p>
         </p:txBody>
@@ -5083,7 +5083,7 @@
                 </a:solidFill>
                 <a:latin typeface="Arial"/>
               </a:rPr>
-              <a:t>The app opens into the game; a bottom bar reaches the forum and the dashboard (Activity, Sessions, Compare, Budget). Inspired by dsh-context and dsh-pet. Log-dependent sections show an empty state when records are unavailable.</a:t>
+              <a:t>The app opens on the dashboard — the statistics home screen with Activity, Sessions, Compare and Budget, and the advice agent entered from it. A bottom bar reaches the game and the forum. Inspired by dsh-context and dsh-pet. Log-dependent sections show an empty state when records are unavailable.</a:t>
             </a:r>
           </a:p>
         </p:txBody>
@@ -6460,7 +6460,7 @@
                           </a:solidFill>
                           <a:latin typeface="Arial"/>
                         </a:rPr>
-                        <a:t>Official model and pricing posts plus user tips, ranked for the in-game agent</a:t>
+                        <a:t>Official model and pricing posts plus user tips, ranked for the advice agent</a:t>
                       </a:r>
                     </a:p>
                   </a:txBody>
@@ -6848,7 +6848,7 @@
                           </a:solidFill>
                           <a:latin typeface="Arial"/>
                         </a:rPr>
-                        <a:t>In-game advice agent with function calling over read-only tools, reading usage records and hot forum posts</a:t>
+                        <a:t>Advice agent on the home screen with function calling over read-only tools, reading usage records and hot forum posts</a:t>
                       </a:r>
                     </a:p>
                   </a:txBody>
@@ -7580,7 +7580,7 @@
                           </a:solidFill>
                           <a:latin typeface="Arial"/>
                         </a:rPr>
-                        <a:t>Implement agent profiles, usage-log import, Room/Firestore records, versioned pricing, CNY display and the dashboard.</a:t>
+                        <a:t>Implement agent profiles, usage-log import, Room/Firestore records, versioned pricing, CNY display and the analytics home screen.</a:t>
                       </a:r>
                     </a:p>
                   </a:txBody>
@@ -7878,7 +7878,7 @@
                           </a:solidFill>
                           <a:latin typeface="Arial"/>
                         </a:rPr>
-                        <a:t>Add budgets and sessions; build the tower-defence loop (season, token-to-resource conversion, user-started waves) and the agent panel; connect one model to three read-only tools.</a:t>
+                        <a:t>Add budgets and sessions; build the tower-defence loop (season, token-to-resource conversion, user-started waves); add the agent panel to the home screen and connect one model to three read-only tools.</a:t>
                       </a:r>
                     </a:p>
                   </a:txBody>
@@ -8703,7 +8703,7 @@
                 </a:solidFill>
                 <a:latin typeface="Arial"/>
               </a:rPr>
-              <a:t>Account isolation → tracked Codex, ZCode and DeepSeek-side profiles → three provider estimates from dated token logs → a season in which those tokens became build resources → heatmap and budget warning → an agent question such as "Why did cost rise?", answered with a queried summary, evidence and its own estimated API cost.</a:t>
+              <a:t>Account isolation → tracked Codex, ZCode and DeepSeek-side profiles → three provider estimates from dated token logs → heatmap and budget warning → an agent question asked from that screen, such as "Why did cost rise?", answered with a queried summary, evidence and its own estimated API cost → a season in which those tokens became build resources.</a:t>
             </a:r>
           </a:p>
         </p:txBody>
@@ -9948,7 +9948,7 @@
                           </a:solidFill>
                           <a:latin typeface="Arial"/>
                         </a:rPr>
-                        <a:t>Game, analytics, forum and the in-game advice agent</a:t>
+                        <a:t>Analytics, game, forum and the advice agent on the home screen</a:t>
                       </a:r>
                     </a:p>
                   </a:txBody>
@@ -10443,7 +10443,7 @@
                 </a:solidFill>
                 <a:latin typeface="Arial"/>
               </a:rPr>
-              <a:t>An API-cost companion that makes agent spend visible</a:t>
+              <a:t>An API-cost analytics app that makes agent spend visible</a:t>
             </a:r>
           </a:p>
         </p:txBody>
@@ -10518,7 +10518,7 @@
                 </a:solidFill>
                 <a:latin typeface="Arial"/>
               </a:rPr>
-              <a:t>TokenTrail is an Android app for people who pay for coding agents with an API key. It prices the usage those agents already logged, turns that usage into a monthly tower-defence season, and answers cost questions with evidence.</a:t>
+              <a:t>TokenTrail is an Android app for people who pay for coding agents with an API key. It opens on a statistics home screen that prices the usage those agents already logged and answers cost questions with evidence, and it turns that usage into a monthly tower-defence season.</a:t>
             </a:r>
           </a:p>
         </p:txBody>
@@ -10532,6 +10532,81 @@
         <p:spPr>
           <a:xfrm>
             <a:off x="658368" y="2249424"/>
+            <a:ext cx="3466490" cy="1426464"/>
+          </a:xfrm>
+          <a:prstGeom prst="roundRect">
+            <a:avLst>
+              <a:gd name="adj" fmla="val 6000"/>
+            </a:avLst>
+          </a:prstGeom>
+          <a:solidFill>
+            <a:srgbClr val="EDF6F2"/>
+          </a:solidFill>
+          <a:ln w="9525">
+            <a:solidFill>
+              <a:srgbClr val="BDD0D8"/>
+            </a:solidFill>
+          </a:ln>
+          <a:effectLst/>
+        </p:spPr>
+        <p:txBody>
+          <a:bodyPr rtlCol="0" anchor="t" wrap="square" lIns="155448" rIns="155448" tIns="124358" bIns="124358"/>
+          <a:lstStyle/>
+          <a:p>
+            <a:pPr algn="l">
+              <a:lnSpc>
+                <a:spcPct val="116000"/>
+              </a:lnSpc>
+              <a:spcBef>
+                <a:spcPts val="0"/>
+              </a:spcBef>
+              <a:spcAft>
+                <a:spcPts val="300"/>
+              </a:spcAft>
+            </a:pPr>
+            <a:r>
+              <a:rPr sz="1350" b="1" i="0">
+                <a:solidFill>
+                  <a:srgbClr val="2E766E"/>
+                </a:solidFill>
+                <a:latin typeface="Arial"/>
+              </a:rPr>
+              <a:t>API-cost analytics (home)</a:t>
+            </a:r>
+          </a:p>
+          <a:p>
+            <a:pPr algn="l">
+              <a:lnSpc>
+                <a:spcPct val="114000"/>
+              </a:lnSpc>
+              <a:spcBef>
+                <a:spcPts val="0"/>
+              </a:spcBef>
+              <a:spcAft>
+                <a:spcPts val="0"/>
+              </a:spcAft>
+            </a:pPr>
+            <a:r>
+              <a:rPr sz="1150" b="0" i="0">
+                <a:solidFill>
+                  <a:srgbClr val="2B3A42"/>
+                </a:solidFill>
+                <a:latin typeface="Arial"/>
+              </a:rPr>
+              <a:t>Prices logged calls from Codex, ZCode and a DeepSeek-side tool using dated official rates, and compares agents.</a:t>
+            </a:r>
+          </a:p>
+        </p:txBody>
+      </p:sp>
+      <p:sp>
+        <p:nvSpPr>
+          <p:cNvPr id="10" name="Rounded Rectangle 9"/>
+          <p:cNvSpPr/>
+          <p:nvPr/>
+        </p:nvSpPr>
+        <p:spPr>
+          <a:xfrm>
+            <a:off x="4362602" y="2249424"/>
             <a:ext cx="3466490" cy="1426464"/>
           </a:xfrm>
           <a:prstGeom prst="roundRect">
@@ -10593,82 +10668,7 @@
                 </a:solidFill>
                 <a:latin typeface="Arial"/>
               </a:rPr>
-              <a:t>The home screen. Tokens you have already spent become building resources in a season that resets each month.</a:t>
-            </a:r>
-          </a:p>
-        </p:txBody>
-      </p:sp>
-      <p:sp>
-        <p:nvSpPr>
-          <p:cNvPr id="10" name="Rounded Rectangle 9"/>
-          <p:cNvSpPr/>
-          <p:nvPr/>
-        </p:nvSpPr>
-        <p:spPr>
-          <a:xfrm>
-            <a:off x="4362602" y="2249424"/>
-            <a:ext cx="3466490" cy="1426464"/>
-          </a:xfrm>
-          <a:prstGeom prst="roundRect">
-            <a:avLst>
-              <a:gd name="adj" fmla="val 6000"/>
-            </a:avLst>
-          </a:prstGeom>
-          <a:solidFill>
-            <a:srgbClr val="EDF6F2"/>
-          </a:solidFill>
-          <a:ln w="9525">
-            <a:solidFill>
-              <a:srgbClr val="BDD0D8"/>
-            </a:solidFill>
-          </a:ln>
-          <a:effectLst/>
-        </p:spPr>
-        <p:txBody>
-          <a:bodyPr rtlCol="0" anchor="t" wrap="square" lIns="155448" rIns="155448" tIns="124358" bIns="124358"/>
-          <a:lstStyle/>
-          <a:p>
-            <a:pPr algn="l">
-              <a:lnSpc>
-                <a:spcPct val="116000"/>
-              </a:lnSpc>
-              <a:spcBef>
-                <a:spcPts val="0"/>
-              </a:spcBef>
-              <a:spcAft>
-                <a:spcPts val="300"/>
-              </a:spcAft>
-            </a:pPr>
-            <a:r>
-              <a:rPr sz="1350" b="1" i="0">
-                <a:solidFill>
-                  <a:srgbClr val="2E766E"/>
-                </a:solidFill>
-                <a:latin typeface="Arial"/>
-              </a:rPr>
-              <a:t>API-cost analytics</a:t>
-            </a:r>
-          </a:p>
-          <a:p>
-            <a:pPr algn="l">
-              <a:lnSpc>
-                <a:spcPct val="114000"/>
-              </a:lnSpc>
-              <a:spcBef>
-                <a:spcPts val="0"/>
-              </a:spcBef>
-              <a:spcAft>
-                <a:spcPts val="0"/>
-              </a:spcAft>
-            </a:pPr>
-            <a:r>
-              <a:rPr sz="1150" b="0" i="0">
-                <a:solidFill>
-                  <a:srgbClr val="2B3A42"/>
-                </a:solidFill>
-                <a:latin typeface="Arial"/>
-              </a:rPr>
-              <a:t>Prices logged calls from Codex, ZCode and a DeepSeek-side tool using dated official rates, and compares agents.</a:t>
+              <a:t>A supporting tab. Tokens you have already spent become building resources in a season that resets each month.</a:t>
             </a:r>
           </a:p>
         </p:txBody>
@@ -10743,7 +10743,7 @@
                 </a:solidFill>
                 <a:latin typeface="Arial"/>
               </a:rPr>
-              <a:t>Official model and pricing posts plus user tips; the hot posts feed the in-game advice agent.</a:t>
+              <a:t>Official model and pricing posts plus user tips; the hot posts feed the advice agent.</a:t>
             </a:r>
           </a:p>
         </p:txBody>
@@ -10794,7 +10794,7 @@
                 </a:solidFill>
                 <a:latin typeface="Arial"/>
               </a:rPr>
-              <a:t>And an advice agent inside the game.  </a:t>
+              <a:t>And an advice agent on that home screen.  </a:t>
             </a:r>
             <a:r>
               <a:rPr sz="1300" b="0" i="0">
@@ -12364,7 +12364,7 @@
                 </a:solidFill>
                 <a:latin typeface="Arial"/>
               </a:rPr>
-              <a:t>Its entry point inspires our in-game agent panel.</a:t>
+              <a:t>Its entry point inspires our advice agent panel on the home screen.</a:t>
             </a:r>
           </a:p>
         </p:txBody>
@@ -14340,7 +14340,7 @@
                           </a:solidFill>
                           <a:latin typeface="Arial"/>
                         </a:rPr>
-                        <a:t>Java/XML, Material Components and Navigation; ViewModel/LiveData for state; RecyclerView and MPAndroidChart for trends; a tower-defence game surface and the in-game agent panel.</a:t>
+                        <a:t>Java/XML, Material Components and Navigation; ViewModel/LiveData for state; RecyclerView and MPAndroidChart for trends; a tower-defence game surface and the advice agent panel on the home screen.</a:t>
                       </a:r>
                     </a:p>
                   </a:txBody>
@@ -15470,7 +15470,7 @@
                 </a:solidFill>
                 <a:latin typeface="Arial"/>
               </a:rPr>
-              <a:t>three core parts — the monthly tower-defence game, the API-cost analytics view and the community forum. The advice agent can recommend but cannot execute coding agents or enforce a hard cap.</a:t>
+              <a:t>statistics are the app's main purpose. Three core parts — the API-cost analytics home screen, the monthly tower-defence game and the community forum. The advice agent can recommend but cannot execute coding agents or enforce a hard cap.</a:t>
             </a:r>
           </a:p>
         </p:txBody>
@@ -15806,7 +15806,7 @@
                 </a:solidFill>
                 <a:latin typeface="Arial"/>
               </a:rPr>
-              <a:t>The home screen is the game.  </a:t>
+              <a:t>It has its own tab.  </a:t>
             </a:r>
             <a:r>
               <a:rPr sz="1250" b="0" i="0">
@@ -15815,7 +15815,7 @@
                 </a:solidFill>
                 <a:latin typeface="Arial"/>
               </a:rPr>
-              <a:t>It is played in monthly seasons that match the billing cycle AI subscriptions already follow.</a:t>
+              <a:t>Reached from the bottom bar. It is played in monthly seasons that match the billing cycle AI subscriptions already follow.</a:t>
             </a:r>
           </a:p>
           <a:p>

--- a/docs/TokenTrail_Project_Outline_Slides.pptx
+++ b/docs/TokenTrail_Project_Outline_Slides.pptx
@@ -3408,7 +3408,7 @@
                 </a:solidFill>
                 <a:latin typeface="Arial"/>
               </a:rPr>
-              <a:t>Android · Java/XML · Firebase Auth + Firestore · Room · Java advice service</a:t>
+              <a:t>Android · Java/XML · Room · Java advice service on the team's own server</a:t>
             </a:r>
           </a:p>
         </p:txBody>
@@ -3701,7 +3701,7 @@
                 </a:solidFill>
                 <a:latin typeface="Arial"/>
               </a:rPr>
-              <a:t>5 · NEW FEATURE B</a:t>
+              <a:t>5 · CORE FEATURE B</a:t>
             </a:r>
           </a:p>
         </p:txBody>
@@ -3746,7 +3746,7 @@
                 </a:solidFill>
                 <a:latin typeface="Arial"/>
               </a:rPr>
-              <a:t>An advice agent that answers from evidence, not opinion</a:t>
+              <a:t>An assistant that answers from evidence, not opinion</a:t>
             </a:r>
           </a:p>
         </p:txBody>
@@ -3829,17 +3829,17 @@
           <a:p>
             <a:pPr algn="l">
               <a:lnSpc>
-                <a:spcPct val="114000"/>
-              </a:lnSpc>
-              <a:spcBef>
-                <a:spcPts val="0"/>
-              </a:spcBef>
-              <a:spcAft>
-                <a:spcPts val="700"/>
-              </a:spcAft>
-            </a:pPr>
-            <a:r>
-              <a:rPr sz="1250" b="0" i="0">
+                <a:spcPct val="113000"/>
+              </a:lnSpc>
+              <a:spcBef>
+                <a:spcPts val="0"/>
+              </a:spcBef>
+              <a:spcAft>
+                <a:spcPts val="600"/>
+              </a:spcAft>
+            </a:pPr>
+            <a:r>
+              <a:rPr sz="1200" b="0" i="0">
                 <a:solidFill>
                   <a:srgbClr val="A17431"/>
                 </a:solidFill>
@@ -3848,7 +3848,7 @@
               <a:t>▪  </a:t>
             </a:r>
             <a:r>
-              <a:rPr sz="1250" b="1" i="0">
+              <a:rPr sz="1200" b="1" i="0">
                 <a:solidFill>
                   <a:srgbClr val="315E75"/>
                 </a:solidFill>
@@ -3857,29 +3857,29 @@
               <a:t>It lives on the home screen.  </a:t>
             </a:r>
             <a:r>
-              <a:rPr sz="1250" b="0" i="0">
+              <a:rPr sz="1200" b="0" i="0">
                 <a:solidFill>
                   <a:srgbClr val="2B3A42"/>
                 </a:solidFill>
                 <a:latin typeface="Arial"/>
               </a:rPr>
-              <a:t>An expandable question panel on the analytics dashboard, where the figures it reasons about already are. It reads two sources: your logged usage and recent forum posts.</a:t>
+              <a:t>An "Ask AI / hold to talk" entry above the navigation opens an expandable panel on the analytics dashboard, where the figures it reasons about already are. It reads your logged usage and recent forum posts.</a:t>
             </a:r>
           </a:p>
           <a:p>
             <a:pPr algn="l">
               <a:lnSpc>
-                <a:spcPct val="114000"/>
-              </a:lnSpc>
-              <a:spcBef>
-                <a:spcPts val="0"/>
-              </a:spcBef>
-              <a:spcAft>
-                <a:spcPts val="700"/>
-              </a:spcAft>
-            </a:pPr>
-            <a:r>
-              <a:rPr sz="1250" b="0" i="0">
+                <a:spcPct val="113000"/>
+              </a:lnSpc>
+              <a:spcBef>
+                <a:spcPts val="0"/>
+              </a:spcBef>
+              <a:spcAft>
+                <a:spcPts val="600"/>
+              </a:spcAft>
+            </a:pPr>
+            <a:r>
+              <a:rPr sz="1200" b="0" i="0">
                 <a:solidFill>
                   <a:srgbClr val="A17431"/>
                 </a:solidFill>
@@ -3888,38 +3888,78 @@
               <a:t>▪  </a:t>
             </a:r>
             <a:r>
-              <a:rPr sz="1250" b="1" i="0">
+              <a:rPr sz="1200" b="1" i="0">
                 <a:solidFill>
                   <a:srgbClr val="315E75"/>
                 </a:solidFill>
                 <a:latin typeface="Arial"/>
               </a:rPr>
+              <a:t>Ask by text, or hold to talk.  </a:t>
+            </a:r>
+            <a:r>
+              <a:rPr sz="1200" b="0" i="0">
+                <a:solidFill>
+                  <a:srgbClr val="2B3A42"/>
+                </a:solidFill>
+                <a:latin typeface="Arial"/>
+              </a:rPr>
+              <a:t>Dictate a question, then review or edit the transcript before sending. The microphone is requested when used; denial or failure leaves typing available, and raw audio is not retained by default.</a:t>
+            </a:r>
+          </a:p>
+          <a:p>
+            <a:pPr algn="l">
+              <a:lnSpc>
+                <a:spcPct val="113000"/>
+              </a:lnSpc>
+              <a:spcBef>
+                <a:spcPts val="0"/>
+              </a:spcBef>
+              <a:spcAft>
+                <a:spcPts val="600"/>
+              </a:spcAft>
+            </a:pPr>
+            <a:r>
+              <a:rPr sz="1200" b="0" i="0">
+                <a:solidFill>
+                  <a:srgbClr val="A17431"/>
+                </a:solidFill>
+                <a:latin typeface="Arial"/>
+              </a:rPr>
+              <a:t>▪  </a:t>
+            </a:r>
+            <a:r>
+              <a:rPr sz="1200" b="1" i="0">
+                <a:solidFill>
+                  <a:srgbClr val="315E75"/>
+                </a:solidFill>
+                <a:latin typeface="Arial"/>
+              </a:rPr>
               <a:t>A Java service does the work.  </a:t>
             </a:r>
             <a:r>
-              <a:rPr sz="1250" b="0" i="0">
+              <a:rPr sz="1200" b="0" i="0">
                 <a:solidFill>
                   <a:srgbClr val="2B3A42"/>
                 </a:solidFill>
                 <a:latin typeface="Arial"/>
               </a:rPr>
-              <a:t>It calls one selected external GPT, GLM or DeepSeek model, which may request read-only tools through function calling. Java executes and validates every call.</a:t>
+              <a:t>It calls one selected OpenAI, Xiaomi MiMo or DeepSeek pay-as-you-go model, which may request tools through function calling. Java executes and validates every call.</a:t>
             </a:r>
           </a:p>
           <a:p>
             <a:pPr algn="l">
               <a:lnSpc>
-                <a:spcPct val="114000"/>
-              </a:lnSpc>
-              <a:spcBef>
-                <a:spcPts val="0"/>
-              </a:spcBef>
-              <a:spcAft>
-                <a:spcPts val="700"/>
-              </a:spcAft>
-            </a:pPr>
-            <a:r>
-              <a:rPr sz="1250" b="0" i="0">
+                <a:spcPct val="113000"/>
+              </a:lnSpc>
+              <a:spcBef>
+                <a:spcPts val="0"/>
+              </a:spcBef>
+              <a:spcAft>
+                <a:spcPts val="600"/>
+              </a:spcAft>
+            </a:pPr>
+            <a:r>
+              <a:rPr sz="1200" b="0" i="0">
                 <a:solidFill>
                   <a:srgbClr val="A17431"/>
                 </a:solidFill>
@@ -3928,38 +3968,38 @@
               <a:t>▪  </a:t>
             </a:r>
             <a:r>
-              <a:rPr sz="1250" b="1" i="0">
+              <a:rPr sz="1200" b="1" i="0">
                 <a:solidFill>
                   <a:srgbClr val="315E75"/>
                 </a:solidFill>
                 <a:latin typeface="Arial"/>
               </a:rPr>
-              <a:t>Four read-only tools.  </a:t>
-            </a:r>
-            <a:r>
-              <a:rPr sz="1250" b="0" i="0">
+              <a:t>Five read-only tools.  </a:t>
+            </a:r>
+            <a:r>
+              <a:rPr sz="1200" b="0" i="0">
                 <a:solidFill>
                   <a:srgbClr val="2B3A42"/>
                 </a:solidFill>
                 <a:latin typeface="Arial"/>
               </a:rPr>
-              <a:t>getUsageSummary · getBudgetStatus · compareAgentCosts · getForumHighlights.</a:t>
+              <a:t>getUsageSummary · getBudgetStatus · compareAgentCosts · getForumHighlights · getMyThreads. The UID comes from the signed session token, never from a parameter.</a:t>
             </a:r>
           </a:p>
           <a:p>
             <a:pPr algn="l">
               <a:lnSpc>
-                <a:spcPct val="114000"/>
-              </a:lnSpc>
-              <a:spcBef>
-                <a:spcPts val="0"/>
-              </a:spcBef>
-              <a:spcAft>
-                <a:spcPts val="700"/>
-              </a:spcAft>
-            </a:pPr>
-            <a:r>
-              <a:rPr sz="1250" b="0" i="0">
+                <a:spcPct val="113000"/>
+              </a:lnSpc>
+              <a:spcBef>
+                <a:spcPts val="0"/>
+              </a:spcBef>
+              <a:spcAft>
+                <a:spcPts val="600"/>
+              </a:spcAft>
+            </a:pPr>
+            <a:r>
+              <a:rPr sz="1200" b="0" i="0">
                 <a:solidFill>
                   <a:srgbClr val="A17431"/>
                 </a:solidFill>
@@ -3968,7 +4008,7 @@
               <a:t>▪  </a:t>
             </a:r>
             <a:r>
-              <a:rPr sz="1250" b="1" i="0">
+              <a:rPr sz="1200" b="1" i="0">
                 <a:solidFill>
                   <a:srgbClr val="315E75"/>
                 </a:solidFill>
@@ -3977,84 +4017,44 @@
               <a:t>It admits what it does not know.  </a:t>
             </a:r>
             <a:r>
-              <a:rPr sz="1250" b="0" i="0">
+              <a:rPr sz="1200" b="0" i="0">
                 <a:solidFill>
                   <a:srgbClr val="2B3A42"/>
                 </a:solidFill>
                 <a:latin typeface="Arial"/>
               </a:rPr>
-              <a:t>Replies state evidence and missing data; no logs means no cost-based answer. Its own tokens are tracked separately from coding-agent usage.</a:t>
+              <a:t>Replies state evidence, price versions and missing data; no logs means no cost-based answer. Its own tokens and cost sit in a separate ledger, excluded from coding-agent totals and game resources.</a:t>
             </a:r>
           </a:p>
           <a:p>
             <a:pPr algn="l">
               <a:lnSpc>
-                <a:spcPct val="114000"/>
-              </a:lnSpc>
-              <a:spcBef>
-                <a:spcPts val="0"/>
-              </a:spcBef>
-              <a:spcAft>
-                <a:spcPts val="700"/>
-              </a:spcAft>
-            </a:pPr>
-            <a:r>
-              <a:rPr sz="1250" b="0" i="0">
-                <a:solidFill>
-                  <a:srgbClr val="A17431"/>
-                </a:solidFill>
-                <a:latin typeface="Arial"/>
-              </a:rPr>
-              <a:t>▪  </a:t>
-            </a:r>
-            <a:r>
-              <a:rPr sz="1250" b="1" i="0">
-                <a:solidFill>
-                  <a:srgbClr val="315E75"/>
-                </a:solidFill>
-                <a:latin typeface="Arial"/>
-              </a:rPr>
-              <a:t>Cost, never quality.  </a:t>
-            </a:r>
-            <a:r>
-              <a:rPr sz="1250" b="0" i="0">
+                <a:spcPct val="115000"/>
+              </a:lnSpc>
+              <a:spcBef>
+                <a:spcPts val="500"/>
+              </a:spcBef>
+              <a:spcAft>
+                <a:spcPts val="0"/>
+              </a:spcAft>
+            </a:pPr>
+            <a:r>
+              <a:rPr sz="1150" b="1" i="0">
+                <a:solidFill>
+                  <a:srgbClr val="2E766E"/>
+                </a:solidFill>
+                <a:latin typeface="Arial"/>
+              </a:rPr>
+              <a:t>Boundary.  </a:t>
+            </a:r>
+            <a:r>
+              <a:rPr sz="1150" b="0" i="0">
                 <a:solidFill>
                   <a:srgbClr val="2B3A42"/>
                 </a:solidFill>
                 <a:latin typeface="Arial"/>
               </a:rPr>
-              <a:t>It compares agents on cost and token use, and never on how good an answer was.</a:t>
-            </a:r>
-          </a:p>
-          <a:p>
-            <a:pPr algn="l">
-              <a:lnSpc>
-                <a:spcPct val="116000"/>
-              </a:lnSpc>
-              <a:spcBef>
-                <a:spcPts val="600"/>
-              </a:spcBef>
-              <a:spcAft>
-                <a:spcPts val="0"/>
-              </a:spcAft>
-            </a:pPr>
-            <a:r>
-              <a:rPr sz="1200" b="1" i="0">
-                <a:solidFill>
-                  <a:srgbClr val="2E766E"/>
-                </a:solidFill>
-                <a:latin typeface="Arial"/>
-              </a:rPr>
-              <a:t>Boundary.  </a:t>
-            </a:r>
-            <a:r>
-              <a:rPr sz="1200" b="0" i="0">
-                <a:solidFill>
-                  <a:srgbClr val="2B3A42"/>
-                </a:solidFill>
-                <a:latin typeface="Arial"/>
-              </a:rPr>
-              <a:t>The agent can recommend but cannot run, route or interrupt a coding agent, and cannot enforce a hard spending cap.</a:t>
+              <a:t>It can recommend but cannot run, route or interrupt a coding agent, and cannot enforce a hard spending cap. It compares cost and token use, never answer quality.</a:t>
             </a:r>
           </a:p>
         </p:txBody>
@@ -4333,8 +4333,8 @@
         </p:blipFill>
         <p:spPr>
           <a:xfrm>
-            <a:off x="1569567" y="1554480"/>
-            <a:ext cx="9052560" cy="957307"/>
+            <a:off x="2163927" y="1444752"/>
+            <a:ext cx="7863840" cy="1501940"/>
           </a:xfrm>
           <a:prstGeom prst="rect">
             <a:avLst/>
@@ -4349,8 +4349,8 @@
         </p:nvSpPr>
         <p:spPr>
           <a:xfrm>
-            <a:off x="658368" y="2670048"/>
-            <a:ext cx="2581579" cy="1481328"/>
+            <a:off x="658368" y="3054096"/>
+            <a:ext cx="2581579" cy="1426464"/>
           </a:xfrm>
           <a:prstGeom prst="roundRect">
             <a:avLst>
@@ -4411,7 +4411,7 @@
                 </a:solidFill>
                 <a:latin typeface="Arial"/>
               </a:rPr>
-              <a:t>Agent profile and key label, authorised usage logs, user questions, forum posts.</a:t>
+              <a:t>Profiles, billing mode and budgets; authorised logs, text or confirmed speech, posts and game actions.</a:t>
             </a:r>
           </a:p>
         </p:txBody>
@@ -4424,8 +4424,8 @@
         </p:nvSpPr>
         <p:spPr>
           <a:xfrm>
-            <a:off x="3422827" y="2670048"/>
-            <a:ext cx="2581579" cy="1481328"/>
+            <a:off x="3422827" y="3054096"/>
+            <a:ext cx="2581579" cy="1426464"/>
           </a:xfrm>
           <a:prstGeom prst="roundRect">
             <a:avLst>
@@ -4486,7 +4486,7 @@
                 </a:solidFill>
                 <a:latin typeface="Arial"/>
               </a:rPr>
-              <a:t>Java prices dated usage, compares agents by cost and converts spent tokens into resources.</a:t>
+              <a:t>Filter and de-duplicate logs; price usage; read-only summaries; rank posts and convert game resources.</a:t>
             </a:r>
           </a:p>
         </p:txBody>
@@ -4499,8 +4499,8 @@
         </p:nvSpPr>
         <p:spPr>
           <a:xfrm>
-            <a:off x="6187287" y="2670048"/>
-            <a:ext cx="2581579" cy="1481328"/>
+            <a:off x="6187287" y="3054096"/>
+            <a:ext cx="2581579" cy="1426464"/>
           </a:xfrm>
           <a:prstGeom prst="roundRect">
             <a:avLst>
@@ -4561,7 +4561,7 @@
                 </a:solidFill>
                 <a:latin typeface="Arial"/>
               </a:rPr>
-              <a:t>Firebase Auth; UID-restricted Firestore; Room for usage, price versions, game state and advice history.</a:t>
+              <a:t>Room holds local records. The server-side store holds user sync, budgets, game state and the assistant ledger; public posts are separate.</a:t>
             </a:r>
           </a:p>
         </p:txBody>
@@ -4574,8 +4574,8 @@
         </p:nvSpPr>
         <p:spPr>
           <a:xfrm>
-            <a:off x="8951747" y="2670048"/>
-            <a:ext cx="2581579" cy="1481328"/>
+            <a:off x="8951747" y="3054096"/>
+            <a:ext cx="2581579" cy="1426464"/>
           </a:xfrm>
           <a:prstGeom prst="roundRect">
             <a:avLst>
@@ -4636,7 +4636,7 @@
                 </a:solidFill>
                 <a:latin typeface="Arial"/>
               </a:rPr>
-              <a:t>Cost cards, heatmap, sessions, budget alerts and the advice agent, plus the game and forum, with explicit unavailable states.</a:t>
+              <a:t>Costs, heatmap, sessions, budgets and AI evidence; forum lists and real-time battle feedback.</a:t>
             </a:r>
           </a:p>
         </p:txBody>
@@ -4649,8 +4649,8 @@
         </p:nvSpPr>
         <p:spPr>
           <a:xfrm>
-            <a:off x="658368" y="4352544"/>
-            <a:ext cx="10874959" cy="960120"/>
+            <a:off x="658368" y="4608576"/>
+            <a:ext cx="10874959" cy="932688"/>
           </a:xfrm>
           <a:prstGeom prst="roundRect">
             <a:avLst>
@@ -4711,7 +4711,7 @@
                 </a:solidFill>
                 <a:latin typeface="Arial"/>
               </a:rPr>
-              <a:t>Model responses report usage only for calls the caller observed, so imported agent logs are the primary input and the agent cannot see a live coding session without a separate event feed. The external model receives selected summaries — never API secrets or prompt text.</a:t>
+              <a:t>Verify the log version and the billing mode; DSH may need JSONL or Zstandard decoding. The five tools enforce the caller's UID with bounded queries, and models receive summaries — never secrets or raw agent prompts. Missing logs mean no personalised cost claim, and there is no coding-agent control.</a:t>
             </a:r>
           </a:p>
         </p:txBody>
@@ -4724,7 +4724,7 @@
         </p:nvSpPr>
         <p:spPr>
           <a:xfrm>
-            <a:off x="658368" y="5468112"/>
+            <a:off x="658368" y="5687568"/>
             <a:ext cx="10874959" cy="365760"/>
           </a:xfrm>
           <a:prstGeom prst="rect">
@@ -4984,7 +4984,7 @@
                 </a:solidFill>
                 <a:latin typeface="Arial"/>
               </a:rPr>
-              <a:t>Three screens, opening on the analytics dashboard</a:t>
+              <a:t>Home leads with analytics and the assistant entry</a:t>
             </a:r>
           </a:p>
         </p:txBody>
@@ -5083,7 +5083,7 @@
                 </a:solidFill>
                 <a:latin typeface="Arial"/>
               </a:rPr>
-              <a:t>The app opens on the dashboard — the statistics home screen with Activity, Sessions, Compare and Budget, and the advice agent entered from it. A bottom bar reaches the game and the forum. Inspired by dsh-context and dsh-pet. Log-dependent sections show an empty state when records are unavailable.</a:t>
+              <a:t>Tap "Ask AI" to open the panel, or hold to dictate and confirm the transcript. Sessions expose source, date and token classes only where logs support them, and comparisons use matching filters. Forum and Game are supporting tabs, and assistant API costs are excluded from the home total.</a:t>
             </a:r>
           </a:p>
         </p:txBody>
@@ -5356,7 +5356,7 @@
         </p:nvGraphicFramePr>
         <p:xfrm>
           <a:off x="658368" y="1463040"/>
-          <a:ext cx="10874959" cy="4407408"/>
+          <a:ext cx="10874959" cy="3840480"/>
         </p:xfrm>
         <a:graphic>
           <a:graphicData uri="http://schemas.openxmlformats.org/drawingml/2006/table">
@@ -5445,7 +5445,7 @@
                           </a:solidFill>
                           <a:latin typeface="Arial"/>
                         </a:rPr>
-                        <a:t>Existing features</a:t>
+                        <a:t>Existing feature</a:t>
                       </a:r>
                     </a:p>
                   </a:txBody>
@@ -5490,7 +5490,7 @@
                           </a:solidFill>
                           <a:latin typeface="Arial"/>
                         </a:rPr>
-                        <a:t>Proposed improvements / new features</a:t>
+                        <a:t>TokenTrail improvement / addition</a:t>
                       </a:r>
                     </a:p>
                   </a:txBody>
@@ -5535,7 +5535,7 @@
                           </a:solidFill>
                           <a:latin typeface="Arial"/>
                         </a:rPr>
-                        <a:t>Remarks</a:t>
+                        <a:t>Type</a:t>
                       </a:r>
                     </a:p>
                   </a:txBody>
@@ -5582,7 +5582,7 @@
                         </a:spcAft>
                       </a:pPr>
                       <a:r>
-                        <a:rPr sz="1050" b="1" i="0">
+                        <a:rPr sz="1100" b="1" i="0">
                           <a:solidFill>
                             <a:srgbClr val="315E75"/>
                           </a:solidFill>
@@ -5633,13 +5633,13 @@
                         </a:spcAft>
                       </a:pPr>
                       <a:r>
-                        <a:rPr sz="1050" b="0" i="0">
+                        <a:rPr sz="1100" b="0" i="0">
                           <a:solidFill>
                             <a:srgbClr val="2B3A42"/>
                           </a:solidFill>
                           <a:latin typeface="Arial"/>
                         </a:rPr>
-                        <a:t>Cross-model cost dashboards</a:t>
+                        <a:t>Cost dashboards</a:t>
                       </a:r>
                     </a:p>
                   </a:txBody>
@@ -5678,13 +5678,13 @@
                         </a:spcAft>
                       </a:pPr>
                       <a:r>
-                        <a:rPr sz="1050" b="0" i="0">
+                        <a:rPr sz="1100" b="0" i="0">
                           <a:solidFill>
                             <a:srgbClr val="2B3A42"/>
                           </a:solidFill>
                           <a:latin typeface="Arial"/>
                         </a:rPr>
-                        <a:t>Three providers priced from dated official rates, de-duplicated, each figure carrying source and coverage</a:t>
+                        <a:t>Cross-provider dated estimates with source and coverage</a:t>
                       </a:r>
                     </a:p>
                   </a:txBody>
@@ -5723,13 +5723,13 @@
                         </a:spcAft>
                       </a:pPr>
                       <a:r>
-                        <a:rPr sz="1050" b="0" i="0">
+                        <a:rPr sz="1100" b="0" i="0">
                           <a:solidFill>
                             <a:srgbClr val="2B3A42"/>
                           </a:solidFill>
                           <a:latin typeface="Arial"/>
                         </a:rPr>
-                        <a:t>Improvement</a:t>
+                        <a:t>Improved</a:t>
                       </a:r>
                     </a:p>
                   </a:txBody>
@@ -5776,7 +5776,7 @@
                         </a:spcAft>
                       </a:pPr>
                       <a:r>
-                        <a:rPr sz="1050" b="1" i="0">
+                        <a:rPr sz="1100" b="1" i="0">
                           <a:solidFill>
                             <a:srgbClr val="315E75"/>
                           </a:solidFill>
@@ -5827,13 +5827,13 @@
                         </a:spcAft>
                       </a:pPr>
                       <a:r>
-                        <a:rPr sz="1050" b="0" i="0">
+                        <a:rPr sz="1100" b="0" i="0">
                           <a:solidFill>
                             <a:srgbClr val="2B3A42"/>
                           </a:solidFill>
                           <a:latin typeface="Arial"/>
                         </a:rPr>
-                        <a:t>Chat-history viewers</a:t>
+                        <a:t>Session viewers</a:t>
                       </a:r>
                     </a:p>
                   </a:txBody>
@@ -5872,13 +5872,13 @@
                         </a:spcAft>
                       </a:pPr>
                       <a:r>
-                        <a:rPr sz="1050" b="0" i="0">
+                        <a:rPr sz="1100" b="0" i="0">
                           <a:solidFill>
                             <a:srgbClr val="2B3A42"/>
                           </a:solidFill>
                           <a:latin typeface="Arial"/>
                         </a:rPr>
-                        <a:t>Per-call and per-session token-class breakdown, cache read and write split</a:t>
+                        <a:t>Log-supported sessions and token-class breakdowns</a:t>
                       </a:r>
                     </a:p>
                   </a:txBody>
@@ -5917,13 +5917,13 @@
                         </a:spcAft>
                       </a:pPr>
                       <a:r>
-                        <a:rPr sz="1050" b="0" i="0">
+                        <a:rPr sz="1100" b="0" i="0">
                           <a:solidFill>
                             <a:srgbClr val="2B3A42"/>
                           </a:solidFill>
                           <a:latin typeface="Arial"/>
                         </a:rPr>
-                        <a:t>Improvement</a:t>
+                        <a:t>Improved</a:t>
                       </a:r>
                     </a:p>
                   </a:txBody>
@@ -5970,7 +5970,7 @@
                         </a:spcAft>
                       </a:pPr>
                       <a:r>
-                        <a:rPr sz="1050" b="1" i="0">
+                        <a:rPr sz="1100" b="1" i="0">
                           <a:solidFill>
                             <a:srgbClr val="315E75"/>
                           </a:solidFill>
@@ -6021,13 +6021,13 @@
                         </a:spcAft>
                       </a:pPr>
                       <a:r>
-                        <a:rPr sz="1050" b="0" i="0">
+                        <a:rPr sz="1100" b="0" i="0">
                           <a:solidFill>
                             <a:srgbClr val="2B3A42"/>
                           </a:solidFill>
                           <a:latin typeface="Arial"/>
                         </a:rPr>
-                        <a:t>Desktop context dashboards</a:t>
+                        <a:t>Billing budgets</a:t>
                       </a:r>
                     </a:p>
                   </a:txBody>
@@ -6066,13 +6066,13 @@
                         </a:spcAft>
                       </a:pPr>
                       <a:r>
-                        <a:rPr sz="1050" b="0" i="0">
+                        <a:rPr sz="1100" b="0" i="0">
                           <a:solidFill>
                             <a:srgbClr val="2B3A42"/>
                           </a:solidFill>
                           <a:latin typeface="Arial"/>
                         </a:rPr>
-                        <a:t>Android client with Firebase Auth and UID-scoped rules</a:t>
+                        <a:t>Cross-provider estimated budget and advisory alerts</a:t>
                       </a:r>
                     </a:p>
                   </a:txBody>
@@ -6111,13 +6111,13 @@
                         </a:spcAft>
                       </a:pPr>
                       <a:r>
-                        <a:rPr sz="1050" b="0" i="0">
+                        <a:rPr sz="1100" b="0" i="0">
                           <a:solidFill>
                             <a:srgbClr val="2B3A42"/>
                           </a:solidFill>
                           <a:latin typeface="Arial"/>
                         </a:rPr>
-                        <a:t>Improvement</a:t>
+                        <a:t>Improved</a:t>
                       </a:r>
                     </a:p>
                   </a:txBody>
@@ -6164,7 +6164,7 @@
                         </a:spcAft>
                       </a:pPr>
                       <a:r>
-                        <a:rPr sz="1050" b="1" i="0">
+                        <a:rPr sz="1100" b="1" i="0">
                           <a:solidFill>
                             <a:srgbClr val="315E75"/>
                           </a:solidFill>
@@ -6215,13 +6215,13 @@
                         </a:spcAft>
                       </a:pPr>
                       <a:r>
-                        <a:rPr sz="1050" b="0" i="0">
+                        <a:rPr sz="1100" b="0" i="0">
                           <a:solidFill>
                             <a:srgbClr val="2B3A42"/>
                           </a:solidFill>
                           <a:latin typeface="Arial"/>
                         </a:rPr>
-                        <a:t>Provider billing consoles</a:t>
+                        <a:t>AI assistants</a:t>
                       </a:r>
                     </a:p>
                   </a:txBody>
@@ -6260,13 +6260,13 @@
                         </a:spcAft>
                       </a:pPr>
                       <a:r>
-                        <a:rPr sz="1050" b="0" i="0">
+                        <a:rPr sz="1100" b="0" i="0">
                           <a:solidFill>
                             <a:srgbClr val="2B3A42"/>
                           </a:solidFill>
                           <a:latin typeface="Arial"/>
                         </a:rPr>
-                        <a:t>One cross-provider monthly budget with threshold alerts and a per-session breakdown</a:t>
+                        <a:t>Home AI: text and voice, usage evidence and a separate API ledger</a:t>
                       </a:r>
                     </a:p>
                   </a:txBody>
@@ -6305,13 +6305,13 @@
                         </a:spcAft>
                       </a:pPr>
                       <a:r>
-                        <a:rPr sz="1050" b="0" i="0">
+                        <a:rPr sz="1100" b="0" i="0">
                           <a:solidFill>
                             <a:srgbClr val="2B3A42"/>
                           </a:solidFill>
                           <a:latin typeface="Arial"/>
                         </a:rPr>
-                        <a:t>Improvement</a:t>
+                        <a:t>New</a:t>
                       </a:r>
                     </a:p>
                   </a:txBody>
@@ -6358,7 +6358,7 @@
                         </a:spcAft>
                       </a:pPr>
                       <a:r>
-                        <a:rPr sz="1050" b="1" i="0">
+                        <a:rPr sz="1100" b="1" i="0">
                           <a:solidFill>
                             <a:srgbClr val="315E75"/>
                           </a:solidFill>
@@ -6409,13 +6409,13 @@
                         </a:spcAft>
                       </a:pPr>
                       <a:r>
-                        <a:rPr sz="1050" b="0" i="0">
+                        <a:rPr sz="1100" b="0" i="0">
                           <a:solidFill>
                             <a:srgbClr val="2B3A42"/>
                           </a:solidFill>
                           <a:latin typeface="Arial"/>
                         </a:rPr>
-                        <a:t>Community forums</a:t>
+                        <a:t>Forums</a:t>
                       </a:r>
                     </a:p>
                   </a:txBody>
@@ -6454,13 +6454,13 @@
                         </a:spcAft>
                       </a:pPr>
                       <a:r>
-                        <a:rPr sz="1050" b="0" i="0">
+                        <a:rPr sz="1100" b="0" i="0">
                           <a:solidFill>
                             <a:srgbClr val="2B3A42"/>
                           </a:solidFill>
                           <a:latin typeface="Arial"/>
                         </a:rPr>
-                        <a:t>Official model and pricing posts plus user tips, ranked for the advice agent</a:t>
+                        <a:t>Linked official news, posts and replies, and context for the advice</a:t>
                       </a:r>
                     </a:p>
                   </a:txBody>
@@ -6499,13 +6499,13 @@
                         </a:spcAft>
                       </a:pPr>
                       <a:r>
-                        <a:rPr sz="1050" b="0" i="0">
+                        <a:rPr sz="1100" b="0" i="0">
                           <a:solidFill>
                             <a:srgbClr val="2B3A42"/>
                           </a:solidFill>
                           <a:latin typeface="Arial"/>
                         </a:rPr>
-                        <a:t>Improvement</a:t>
+                        <a:t>Improved</a:t>
                       </a:r>
                     </a:p>
                   </a:txBody>
@@ -6552,7 +6552,7 @@
                         </a:spcAft>
                       </a:pPr>
                       <a:r>
-                        <a:rPr sz="1050" b="1" i="0">
+                        <a:rPr sz="1100" b="1" i="0">
                           <a:solidFill>
                             <a:srgbClr val="315E75"/>
                           </a:solidFill>
@@ -6603,13 +6603,13 @@
                         </a:spcAft>
                       </a:pPr>
                       <a:r>
-                        <a:rPr sz="1050" b="0" i="0">
+                        <a:rPr sz="1100" b="0" i="0">
                           <a:solidFill>
                             <a:srgbClr val="2B3A42"/>
                           </a:solidFill>
                           <a:latin typeface="Arial"/>
                         </a:rPr>
-                        <a:t>Interactive pet with feeding (dsh-pet)</a:t>
+                        <a:t>Tower defence</a:t>
                       </a:r>
                     </a:p>
                   </a:txBody>
@@ -6648,13 +6648,13 @@
                         </a:spcAft>
                       </a:pPr>
                       <a:r>
-                        <a:rPr sz="1050" b="0" i="0">
+                        <a:rPr sz="1100" b="0" i="0">
                           <a:solidFill>
                             <a:srgbClr val="2B3A42"/>
                           </a:solidFill>
                           <a:latin typeface="Arial"/>
                         </a:rPr>
-                        <a:t>Monthly tower-defence season in which tokens already spent convert into build resources, with one-direction base growth and a wave the user starts</a:t>
+                        <a:t>Monthly game resources from verified coding-agent API logs</a:t>
                       </a:r>
                     </a:p>
                   </a:txBody>
@@ -6693,13 +6693,13 @@
                         </a:spcAft>
                       </a:pPr>
                       <a:r>
-                        <a:rPr sz="1050" b="0" i="0">
+                        <a:rPr sz="1100" b="0" i="0">
                           <a:solidFill>
                             <a:srgbClr val="2B3A42"/>
                           </a:solidFill>
                           <a:latin typeface="Arial"/>
                         </a:rPr>
-                        <a:t>New feature</a:t>
+                        <a:t>New</a:t>
                       </a:r>
                     </a:p>
                   </a:txBody>
@@ -6724,200 +6724,6 @@
                     </a:lnB>
                     <a:solidFill>
                       <a:srgbClr val="F7FAFB"/>
-                    </a:solidFill>
-                  </a:tcPr>
-                </a:tc>
-              </a:tr>
-              <a:tr h="566928">
-                <a:tc>
-                  <a:txBody>
-                    <a:bodyPr wrap="square"/>
-                    <a:lstStyle/>
-                    <a:p>
-                      <a:pPr algn="l">
-                        <a:lnSpc>
-                          <a:spcPct val="108000"/>
-                        </a:lnSpc>
-                        <a:spcBef>
-                          <a:spcPts val="0"/>
-                        </a:spcBef>
-                        <a:spcAft>
-                          <a:spcPts val="0"/>
-                        </a:spcAft>
-                      </a:pPr>
-                      <a:r>
-                        <a:rPr sz="1050" b="1" i="0">
-                          <a:solidFill>
-                            <a:srgbClr val="315E75"/>
-                          </a:solidFill>
-                          <a:latin typeface="Arial"/>
-                        </a:rPr>
-                        <a:t>7</a:t>
-                      </a:r>
-                    </a:p>
-                  </a:txBody>
-                  <a:tcPr marL="91440" marR="82296" marT="50292" marB="50292" anchor="ctr">
-                    <a:lnL w="9525" cap="flat" cmpd="sng" algn="ctr">
-                      <a:solidFill>
-                        <a:srgbClr val="BDD0D8"/>
-                      </a:solidFill>
-                      <a:prstDash val="solid"/>
-                    </a:lnL>
-                    <a:lnT w="9525" cap="flat" cmpd="sng" algn="ctr">
-                      <a:solidFill>
-                        <a:srgbClr val="BDD0D8"/>
-                      </a:solidFill>
-                      <a:prstDash val="solid"/>
-                    </a:lnT>
-                    <a:lnB w="9525" cap="flat" cmpd="sng" algn="ctr">
-                      <a:solidFill>
-                        <a:srgbClr val="BDD0D8"/>
-                      </a:solidFill>
-                      <a:prstDash val="solid"/>
-                    </a:lnB>
-                    <a:solidFill>
-                      <a:srgbClr val="FFFFFF"/>
-                    </a:solidFill>
-                  </a:tcPr>
-                </a:tc>
-                <a:tc>
-                  <a:txBody>
-                    <a:bodyPr wrap="square"/>
-                    <a:lstStyle/>
-                    <a:p>
-                      <a:pPr algn="l">
-                        <a:lnSpc>
-                          <a:spcPct val="108000"/>
-                        </a:lnSpc>
-                        <a:spcBef>
-                          <a:spcPts val="0"/>
-                        </a:spcBef>
-                        <a:spcAft>
-                          <a:spcPts val="0"/>
-                        </a:spcAft>
-                      </a:pPr>
-                      <a:r>
-                        <a:rPr sz="1050" b="0" i="0">
-                          <a:solidFill>
-                            <a:srgbClr val="2B3A42"/>
-                          </a:solidFill>
-                          <a:latin typeface="Arial"/>
-                        </a:rPr>
-                        <a:t>General chat assistants</a:t>
-                      </a:r>
-                    </a:p>
-                  </a:txBody>
-                  <a:tcPr marL="91440" marR="82296" marT="50292" marB="50292" anchor="ctr">
-                    <a:lnT w="9525" cap="flat" cmpd="sng" algn="ctr">
-                      <a:solidFill>
-                        <a:srgbClr val="BDD0D8"/>
-                      </a:solidFill>
-                      <a:prstDash val="solid"/>
-                    </a:lnT>
-                    <a:lnB w="9525" cap="flat" cmpd="sng" algn="ctr">
-                      <a:solidFill>
-                        <a:srgbClr val="BDD0D8"/>
-                      </a:solidFill>
-                      <a:prstDash val="solid"/>
-                    </a:lnB>
-                    <a:solidFill>
-                      <a:srgbClr val="FFFFFF"/>
-                    </a:solidFill>
-                  </a:tcPr>
-                </a:tc>
-                <a:tc>
-                  <a:txBody>
-                    <a:bodyPr wrap="square"/>
-                    <a:lstStyle/>
-                    <a:p>
-                      <a:pPr algn="l">
-                        <a:lnSpc>
-                          <a:spcPct val="108000"/>
-                        </a:lnSpc>
-                        <a:spcBef>
-                          <a:spcPts val="0"/>
-                        </a:spcBef>
-                        <a:spcAft>
-                          <a:spcPts val="0"/>
-                        </a:spcAft>
-                      </a:pPr>
-                      <a:r>
-                        <a:rPr sz="1050" b="0" i="0">
-                          <a:solidFill>
-                            <a:srgbClr val="2B3A42"/>
-                          </a:solidFill>
-                          <a:latin typeface="Arial"/>
-                        </a:rPr>
-                        <a:t>Advice agent on the home screen with function calling over read-only tools, reading usage records and hot forum posts</a:t>
-                      </a:r>
-                    </a:p>
-                  </a:txBody>
-                  <a:tcPr marL="91440" marR="82296" marT="50292" marB="50292" anchor="ctr">
-                    <a:lnT w="9525" cap="flat" cmpd="sng" algn="ctr">
-                      <a:solidFill>
-                        <a:srgbClr val="BDD0D8"/>
-                      </a:solidFill>
-                      <a:prstDash val="solid"/>
-                    </a:lnT>
-                    <a:lnB w="9525" cap="flat" cmpd="sng" algn="ctr">
-                      <a:solidFill>
-                        <a:srgbClr val="BDD0D8"/>
-                      </a:solidFill>
-                      <a:prstDash val="solid"/>
-                    </a:lnB>
-                    <a:solidFill>
-                      <a:srgbClr val="FFFFFF"/>
-                    </a:solidFill>
-                  </a:tcPr>
-                </a:tc>
-                <a:tc>
-                  <a:txBody>
-                    <a:bodyPr wrap="square"/>
-                    <a:lstStyle/>
-                    <a:p>
-                      <a:pPr algn="l">
-                        <a:lnSpc>
-                          <a:spcPct val="108000"/>
-                        </a:lnSpc>
-                        <a:spcBef>
-                          <a:spcPts val="0"/>
-                        </a:spcBef>
-                        <a:spcAft>
-                          <a:spcPts val="0"/>
-                        </a:spcAft>
-                      </a:pPr>
-                      <a:r>
-                        <a:rPr sz="1050" b="0" i="0">
-                          <a:solidFill>
-                            <a:srgbClr val="2B3A42"/>
-                          </a:solidFill>
-                          <a:latin typeface="Arial"/>
-                        </a:rPr>
-                        <a:t>New feature</a:t>
-                      </a:r>
-                    </a:p>
-                  </a:txBody>
-                  <a:tcPr marL="91440" marR="82296" marT="50292" marB="50292" anchor="ctr">
-                    <a:lnR w="9525" cap="flat" cmpd="sng" algn="ctr">
-                      <a:solidFill>
-                        <a:srgbClr val="BDD0D8"/>
-                      </a:solidFill>
-                      <a:prstDash val="solid"/>
-                    </a:lnR>
-                    <a:lnT w="9525" cap="flat" cmpd="sng" algn="ctr">
-                      <a:solidFill>
-                        <a:srgbClr val="BDD0D8"/>
-                      </a:solidFill>
-                      <a:prstDash val="solid"/>
-                    </a:lnT>
-                    <a:lnB w="9525" cap="flat" cmpd="sng" algn="ctr">
-                      <a:solidFill>
-                        <a:srgbClr val="BDD0D8"/>
-                      </a:solidFill>
-                      <a:prstDash val="solid"/>
-                    </a:lnB>
-                    <a:solidFill>
-                      <a:srgbClr val="FFFFFF"/>
                     </a:solidFill>
                   </a:tcPr>
                 </a:tc>
@@ -6926,6 +6732,51 @@
           </a:graphicData>
         </a:graphic>
       </p:graphicFrame>
+      <p:sp>
+        <p:nvSpPr>
+          <p:cNvPr id="9" name="TextBox 8"/>
+          <p:cNvSpPr txBox="1"/>
+          <p:nvPr/>
+        </p:nvSpPr>
+        <p:spPr>
+          <a:xfrm>
+            <a:off x="658368" y="5468112"/>
+            <a:ext cx="10874959" cy="365760"/>
+          </a:xfrm>
+          <a:prstGeom prst="rect">
+            <a:avLst/>
+          </a:prstGeom>
+          <a:noFill/>
+        </p:spPr>
+        <p:txBody>
+          <a:bodyPr wrap="square" anchor="t" lIns="0" rIns="0" tIns="0" bIns="0">
+            <a:spAutoFit/>
+          </a:bodyPr>
+          <a:lstStyle/>
+          <a:p>
+            <a:pPr algn="l">
+              <a:lnSpc>
+                <a:spcPct val="116000"/>
+              </a:lnSpc>
+              <a:spcBef>
+                <a:spcPts val="0"/>
+              </a:spcBef>
+              <a:spcAft>
+                <a:spcPts val="0"/>
+              </a:spcAft>
+            </a:pPr>
+            <a:r>
+              <a:rPr sz="1050" b="0" i="0">
+                <a:solidFill>
+                  <a:srgbClr val="7A8C94"/>
+                </a:solidFill>
+                <a:latin typeface="Arial"/>
+              </a:rPr>
+              <a:t>Six rows, in the same order as section 11 of the written outline. Only rows 4 and 6 are new; the rest improve a view the providers already offer one account at a time.</a:t>
+            </a:r>
+          </a:p>
+        </p:txBody>
+      </p:sp>
     </p:spTree>
   </p:cSld>
   <p:clrMapOvr>
@@ -7194,7 +7045,7 @@
         </p:nvGraphicFramePr>
         <p:xfrm>
           <a:off x="658368" y="1463040"/>
-          <a:ext cx="10874959" cy="4352544"/>
+          <a:ext cx="10874959" cy="4078224"/>
         </p:xfrm>
         <a:graphic>
           <a:graphicData uri="http://schemas.openxmlformats.org/drawingml/2006/table">
@@ -7356,7 +7207,7 @@
                   </a:tcPr>
                 </a:tc>
               </a:tr>
-              <a:tr h="786384">
+              <a:tr h="731520">
                 <a:tc>
                   <a:txBody>
                     <a:bodyPr wrap="square"/>
@@ -7374,7 +7225,7 @@
                         </a:spcAft>
                       </a:pPr>
                       <a:r>
-                        <a:rPr sz="1050" b="1" i="0">
+                        <a:rPr sz="1100" b="1" i="0">
                           <a:solidFill>
                             <a:srgbClr val="315E75"/>
                           </a:solidFill>
@@ -7425,13 +7276,13 @@
                         </a:spcAft>
                       </a:pPr>
                       <a:r>
-                        <a:rPr sz="1050" b="0" i="0">
+                        <a:rPr sz="1100" b="0" i="0">
                           <a:solidFill>
                             <a:srgbClr val="2B3A42"/>
                           </a:solidFill>
                           <a:latin typeface="Arial"/>
                         </a:rPr>
-                        <a:t>Confirm API-key agent use cases and UI; set up Firebase Auth and Firestore rules; document usage-log access and pricing dimensions.</a:t>
+                        <a:t>Verify Codex/ZCode/DSH samples, billing modes, rate dimensions and UI; define access rules.</a:t>
                       </a:r>
                     </a:p>
                   </a:txBody>
@@ -7470,13 +7321,13 @@
                         </a:spcAft>
                       </a:pPr>
                       <a:r>
-                        <a:rPr sz="1050" b="0" i="0">
+                        <a:rPr sz="1100" b="0" i="0">
                           <a:solidFill>
                             <a:srgbClr val="2B3A42"/>
                           </a:solidFill>
                           <a:latin typeface="Arial"/>
                         </a:rPr>
-                        <a:t>Neither test account sees the other's records; token-source limits documented.</a:t>
+                        <a:t>Verified sources; isolated accounts.</a:t>
                       </a:r>
                     </a:p>
                   </a:txBody>
@@ -7505,7 +7356,7 @@
                   </a:tcPr>
                 </a:tc>
               </a:tr>
-              <a:tr h="786384">
+              <a:tr h="731520">
                 <a:tc>
                   <a:txBody>
                     <a:bodyPr wrap="square"/>
@@ -7523,7 +7374,7 @@
                         </a:spcAft>
                       </a:pPr>
                       <a:r>
-                        <a:rPr sz="1050" b="1" i="0">
+                        <a:rPr sz="1100" b="1" i="0">
                           <a:solidFill>
                             <a:srgbClr val="315E75"/>
                           </a:solidFill>
@@ -7574,13 +7425,13 @@
                         </a:spcAft>
                       </a:pPr>
                       <a:r>
-                        <a:rPr sz="1050" b="0" i="0">
+                        <a:rPr sz="1100" b="0" i="0">
                           <a:solidFill>
                             <a:srgbClr val="2B3A42"/>
                           </a:solidFill>
                           <a:latin typeface="Arial"/>
                         </a:rPr>
-                        <a:t>Implement agent profiles, usage-log import, Room/Firestore records, versioned pricing, CNY display and the analytics home screen.</a:t>
+                        <a:t>Build import, storage, dated pricing and analytics; define the five read-only tool contracts.</a:t>
                       </a:r>
                     </a:p>
                   </a:txBody>
@@ -7619,13 +7470,13 @@
                         </a:spcAft>
                       </a:pPr>
                       <a:r>
-                        <a:rPr sz="1050" b="0" i="0">
+                        <a:rPr sz="1100" b="0" i="0">
                           <a:solidFill>
                             <a:srgbClr val="2B3A42"/>
                           </a:solidFill>
                           <a:latin typeface="Arial"/>
                         </a:rPr>
-                        <a:t>Each provider's sample calls are priced at the correct dated rate and de-duplicated.</a:t>
+                        <a:t>Correct rates; idempotent import.</a:t>
                       </a:r>
                     </a:p>
                   </a:txBody>
@@ -7654,7 +7505,7 @@
                   </a:tcPr>
                 </a:tc>
               </a:tr>
-              <a:tr h="786384">
+              <a:tr h="731520">
                 <a:tc>
                   <a:txBody>
                     <a:bodyPr wrap="square"/>
@@ -7672,7 +7523,7 @@
                         </a:spcAft>
                       </a:pPr>
                       <a:r>
-                        <a:rPr sz="1050" b="1" i="0">
+                        <a:rPr sz="1100" b="1" i="0">
                           <a:solidFill>
                             <a:srgbClr val="315E75"/>
                           </a:solidFill>
@@ -7723,13 +7574,13 @@
                         </a:spcAft>
                       </a:pPr>
                       <a:r>
-                        <a:rPr sz="1050" b="0" i="0">
+                        <a:rPr sz="1100" b="0" i="0">
                           <a:solidFill>
                             <a:srgbClr val="2B3A42"/>
                           </a:solidFill>
                           <a:latin typeface="Arial"/>
                         </a:rPr>
-                        <a:t>Deliver a working login → add agent → import log → estimated cost → analytics path; separate real logs from sample data.</a:t>
+                        <a:t>Login → profile → import → cost → home.</a:t>
                       </a:r>
                     </a:p>
                   </a:txBody>
@@ -7768,13 +7619,13 @@
                         </a:spcAft>
                       </a:pPr>
                       <a:r>
-                        <a:rPr sz="1050" b="0" i="0">
+                        <a:rPr sz="1100" b="0" i="0">
                           <a:solidFill>
                             <a:srgbClr val="2B3A42"/>
                           </a:solidFill>
                           <a:latin typeface="Arial"/>
                         </a:rPr>
-                        <a:t>Source, description, GitHub link and MP4 per submission guidance.</a:t>
+                        <a:t>Separate real and sample data; source, GitHub link and MP4.</a:t>
                       </a:r>
                     </a:p>
                   </a:txBody>
@@ -7803,7 +7654,7 @@
                   </a:tcPr>
                 </a:tc>
               </a:tr>
-              <a:tr h="786384">
+              <a:tr h="731520">
                 <a:tc>
                   <a:txBody>
                     <a:bodyPr wrap="square"/>
@@ -7821,7 +7672,7 @@
                         </a:spcAft>
                       </a:pPr>
                       <a:r>
-                        <a:rPr sz="1050" b="1" i="0">
+                        <a:rPr sz="1100" b="1" i="0">
                           <a:solidFill>
                             <a:srgbClr val="315E75"/>
                           </a:solidFill>
@@ -7872,13 +7723,13 @@
                         </a:spcAft>
                       </a:pPr>
                       <a:r>
-                        <a:rPr sz="1050" b="0" i="0">
+                        <a:rPr sz="1100" b="0" i="0">
                           <a:solidFill>
                             <a:srgbClr val="2B3A42"/>
                           </a:solidFill>
                           <a:latin typeface="Arial"/>
                         </a:rPr>
-                        <a:t>Add budgets and sessions; build the tower-defence loop (season, token-to-resource conversion, user-started waves); add the agent panel to the home screen and connect one model to three read-only tools.</a:t>
+                        <a:t>Wang: assistant and forum using Zhang's queries. Liu: settlement and the real-time game.</a:t>
                       </a:r>
                     </a:p>
                   </a:txBody>
@@ -7917,13 +7768,13 @@
                         </a:spcAft>
                       </a:pPr>
                       <a:r>
-                        <a:rPr sz="1050" b="0" i="0">
+                        <a:rPr sz="1100" b="0" i="0">
                           <a:solidFill>
                             <a:srgbClr val="2B3A42"/>
                           </a:solidFill>
                           <a:latin typeface="Arial"/>
                         </a:rPr>
-                        <a:t>The agent answers a usage question with evidence and admits missing data; a wave starts and resolves without blocking the UI.</a:t>
+                        <a:t>Cited evidence; typing fallback; ranked posts; smooth waves.</a:t>
                       </a:r>
                     </a:p>
                   </a:txBody>
@@ -7952,7 +7803,7 @@
                   </a:tcPr>
                 </a:tc>
               </a:tr>
-              <a:tr h="786384">
+              <a:tr h="731520">
                 <a:tc>
                   <a:txBody>
                     <a:bodyPr wrap="square"/>
@@ -7970,7 +7821,7 @@
                         </a:spcAft>
                       </a:pPr>
                       <a:r>
-                        <a:rPr sz="1050" b="1" i="0">
+                        <a:rPr sz="1100" b="1" i="0">
                           <a:solidFill>
                             <a:srgbClr val="315E75"/>
                           </a:solidFill>
@@ -8021,13 +7872,13 @@
                         </a:spcAft>
                       </a:pPr>
                       <a:r>
-                        <a:rPr sz="1050" b="0" i="0">
+                        <a:rPr sz="1100" b="0" i="0">
                           <a:solidFill>
                             <a:srgbClr val="2B3A42"/>
                           </a:solidFill>
                           <a:latin typeface="Arial"/>
                         </a:rPr>
-                        <a:t>Evaluate advice accuracy and API cost, balance the season, improve accessibility, verify account isolation and document estimation limits.</a:t>
+                        <a:t>Validate advice, cost separation, game balance, accessibility and isolation; complete the documentation.</a:t>
                       </a:r>
                     </a:p>
                   </a:txBody>
@@ -8066,13 +7917,13 @@
                         </a:spcAft>
                       </a:pPr>
                       <a:r>
-                        <a:rPr sz="1050" b="0" i="0">
+                        <a:rPr sz="1100" b="0" i="0">
                           <a:solidFill>
                             <a:srgbClr val="2B3A42"/>
                           </a:solidFill>
                           <a:latin typeface="Arial"/>
                         </a:rPr>
-                        <a:t>End-to-end demo, report and video; no agent answer invents usage or controls coding agents.</a:t>
+                        <a:t>Demo, tests, report and video; licence records.</a:t>
                       </a:r>
                     </a:p>
                   </a:txBody>
@@ -8113,7 +7964,7 @@
         </p:nvSpPr>
         <p:spPr>
           <a:xfrm>
-            <a:off x="658368" y="5925312"/>
+            <a:off x="658368" y="5742432"/>
             <a:ext cx="10874959" cy="365760"/>
           </a:xfrm>
           <a:prstGeom prst="rect">
@@ -8417,7 +8268,7 @@
         <p:spPr>
           <a:xfrm>
             <a:off x="658368" y="1554480"/>
-            <a:ext cx="3478682" cy="1389888"/>
+            <a:ext cx="3478682" cy="1572768"/>
           </a:xfrm>
           <a:prstGeom prst="roundRect">
             <a:avLst>
@@ -8478,7 +8329,7 @@
                 </a:solidFill>
                 <a:latin typeface="Arial"/>
               </a:rPr>
-              <a:t>The data side — authentication, usage-log import, Room/Firestore, versioned pricing, budgets and the dashboard.</a:t>
+              <a:t>Authentication, log import and storage, dated pricing, budgets, the dashboard and the data-query interfaces.</a:t>
             </a:r>
           </a:p>
         </p:txBody>
@@ -8492,7 +8343,7 @@
         <p:spPr>
           <a:xfrm>
             <a:off x="4356506" y="1554480"/>
-            <a:ext cx="3478682" cy="1389888"/>
+            <a:ext cx="3478682" cy="1572768"/>
           </a:xfrm>
           <a:prstGeom prst="roundRect">
             <a:avLst>
@@ -8553,7 +8404,7 @@
                 </a:solidFill>
                 <a:latin typeface="Arial"/>
               </a:rPr>
-              <a:t>The forum, including its post data and ranking.</a:t>
+              <a:t>The home-screen AI assistant, its text/voice panel, the Java advice service, the five read-only tools and the assistant API ledger; forum news, posts, replies and ranking.</a:t>
             </a:r>
           </a:p>
         </p:txBody>
@@ -8567,7 +8418,7 @@
         <p:spPr>
           <a:xfrm>
             <a:off x="8054644" y="1554480"/>
-            <a:ext cx="3478682" cy="1389888"/>
+            <a:ext cx="3478682" cy="1572768"/>
           </a:xfrm>
           <a:prstGeom prst="roundRect">
             <a:avLst>
@@ -8628,7 +8479,7 @@
                 </a:solidFill>
                 <a:latin typeface="Arial"/>
               </a:rPr>
-              <a:t>The tower-defence game, the server-side agent service, its read-only tools and advice evaluation.</a:t>
+              <a:t>The tower-defence engine and UI, resource settlement, monthly state, placement and upgrades, and enemy waves.</a:t>
             </a:r>
           </a:p>
         </p:txBody>
@@ -8641,8 +8492,8 @@
         </p:nvSpPr>
         <p:spPr>
           <a:xfrm>
-            <a:off x="658368" y="3072384"/>
-            <a:ext cx="10874959" cy="1207008"/>
+            <a:off x="658368" y="3255264"/>
+            <a:ext cx="10874959" cy="1152144"/>
           </a:xfrm>
           <a:prstGeom prst="roundRect">
             <a:avLst>
@@ -8703,7 +8554,7 @@
                 </a:solidFill>
                 <a:latin typeface="Arial"/>
               </a:rPr>
-              <a:t>Account isolation → tracked Codex, ZCode and DeepSeek-side profiles → three provider estimates from dated token logs → heatmap and budget warning → an agent question asked from that screen, such as "Why did cost rise?", answered with a queried summary, evidence and its own estimated API cost → a season in which those tokens became build resources.</a:t>
+              <a:t>Account isolation → tracked Codex, ZCode and DSH profiles → dated estimates from token logs → heatmap and budget warning → "Why did cost rise?" asked by text or confirmed speech, answered with evidence and its own assistant API cost → forum posts and replies → a player-started game wave.</a:t>
             </a:r>
           </a:p>
         </p:txBody>
@@ -8716,8 +8567,8 @@
         </p:nvSpPr>
         <p:spPr>
           <a:xfrm>
-            <a:off x="658368" y="4407408"/>
-            <a:ext cx="10874959" cy="1207008"/>
+            <a:off x="658368" y="4535424"/>
+            <a:ext cx="10874959" cy="1225296"/>
           </a:xfrm>
           <a:prstGeom prst="roundRect">
             <a:avLst>
@@ -8778,7 +8629,7 @@
                 </a:solidFill>
                 <a:latin typeface="Arial"/>
               </a:rPr>
-              <a:t>Tests cover token accounting, price-version boundaries, missing usage, de-duplication and read-only tool limits, with the Firebase Emulator verifying access. Agent replies are checked against tool data, and the game is checked for a resource balance unreachable without logged usage. Published rates can differ from paid amounts; all figures remain estimates.</a:t>
+              <a:t>Test plan exclusion, log formats, token classes, dated and time-based rates, missing data, de-duplication and account/tool isolation. Replies are checked against evidence, text fallback and ledger separation, and re-importing logs grants no duplicate game resources. Sample data never enters real totals.</a:t>
             </a:r>
           </a:p>
         </p:txBody>
@@ -8791,7 +8642,7 @@
         </p:nvSpPr>
         <p:spPr>
           <a:xfrm>
-            <a:off x="658368" y="5724144"/>
+            <a:off x="658368" y="5870448"/>
             <a:ext cx="10874959" cy="365760"/>
           </a:xfrm>
           <a:prstGeom prst="rect">
@@ -9501,7 +9352,7 @@
                           </a:solidFill>
                           <a:latin typeface="Arial"/>
                         </a:rPr>
-                        <a:t>Codex, ZCode, dsh-context, LiteLLM and dsh-pet</a:t>
+                        <a:t>Codex, ZCode, DSH with dsh-context, LiteLLM and dsh-pet</a:t>
                       </a:r>
                     </a:p>
                   </a:txBody>
@@ -9948,7 +9799,7 @@
                           </a:solidFill>
                           <a:latin typeface="Arial"/>
                         </a:rPr>
-                        <a:t>Analytics, game, forum and the advice agent on the home screen</a:t>
+                        <a:t>Analytics and the home-screen assistant as the core; forum and game as supporting tabs</a:t>
                       </a:r>
                     </a:p>
                   </a:txBody>
@@ -10518,7 +10369,7 @@
                 </a:solidFill>
                 <a:latin typeface="Arial"/>
               </a:rPr>
-              <a:t>TokenTrail is an Android app for people who pay for coding agents with an API key. It opens on a statistics home screen that prices the usage those agents already logged and answers cost questions with evidence, and it turns that usage into a monthly tower-defence season.</a:t>
+              <a:t>TokenTrail is an Android API-cost app for people who use several coding agents: Codex with OpenAI, ZCode with Xiaomi MiMo and DSH with DeepSeek. Its analytics home screen prices the pay-as-you-go calls those agents already logged, and an assistant on the same screen answers cost questions with evidence.</a:t>
             </a:r>
           </a:p>
         </p:txBody>
@@ -10532,7 +10383,7 @@
         <p:spPr>
           <a:xfrm>
             <a:off x="658368" y="2249424"/>
-            <a:ext cx="3466490" cy="1426464"/>
+            <a:ext cx="3466490" cy="1755648"/>
           </a:xfrm>
           <a:prstGeom prst="roundRect">
             <a:avLst>
@@ -10565,7 +10416,7 @@
               </a:spcAft>
             </a:pPr>
             <a:r>
-              <a:rPr sz="1350" b="1" i="0">
+              <a:rPr sz="1300" b="1" i="0">
                 <a:solidFill>
                   <a:srgbClr val="2E766E"/>
                 </a:solidFill>
@@ -10587,13 +10438,13 @@
               </a:spcAft>
             </a:pPr>
             <a:r>
-              <a:rPr sz="1150" b="0" i="0">
+              <a:rPr sz="1100" b="0" i="0">
                 <a:solidFill>
                   <a:srgbClr val="2B3A42"/>
                 </a:solidFill>
                 <a:latin typeface="Arial"/>
               </a:rPr>
-              <a:t>Prices logged calls from Codex, ZCode and a DeepSeek-side tool using dated official rates, and compares agents.</a:t>
+              <a:t>Prices logged pay-as-you-go calls from Codex, ZCode and DSH at dated official rates, with source, coverage and session detail wherever the logs support it.</a:t>
             </a:r>
           </a:p>
         </p:txBody>
@@ -10607,7 +10458,7 @@
         <p:spPr>
           <a:xfrm>
             <a:off x="4362602" y="2249424"/>
-            <a:ext cx="3466490" cy="1426464"/>
+            <a:ext cx="3466490" cy="1755648"/>
           </a:xfrm>
           <a:prstGeom prst="roundRect">
             <a:avLst>
@@ -10640,13 +10491,13 @@
               </a:spcAft>
             </a:pPr>
             <a:r>
-              <a:rPr sz="1350" b="1" i="0">
+              <a:rPr sz="1300" b="1" i="0">
                 <a:solidFill>
                   <a:srgbClr val="315E75"/>
                 </a:solidFill>
                 <a:latin typeface="Arial"/>
               </a:rPr>
-              <a:t>Monthly tower-defence game</a:t>
+              <a:t>Home-screen AI assistant</a:t>
             </a:r>
           </a:p>
           <a:p>
@@ -10662,13 +10513,13 @@
               </a:spcAft>
             </a:pPr>
             <a:r>
-              <a:rPr sz="1150" b="0" i="0">
+              <a:rPr sz="1100" b="0" i="0">
                 <a:solidFill>
                   <a:srgbClr val="2B3A42"/>
                 </a:solidFill>
                 <a:latin typeface="Arial"/>
               </a:rPr>
-              <a:t>A supporting tab. Tokens you have already spent become building resources in a season that resets each month.</a:t>
+              <a:t>An "Ask AI / hold to talk" entry above the navigation. Type, or dictate and confirm the transcript; replies cite evidence and admit missing data. Its own API cost is kept separate.</a:t>
             </a:r>
           </a:p>
         </p:txBody>
@@ -10682,7 +10533,7 @@
         <p:spPr>
           <a:xfrm>
             <a:off x="8066836" y="2249424"/>
-            <a:ext cx="3466490" cy="1426464"/>
+            <a:ext cx="3466490" cy="1755648"/>
           </a:xfrm>
           <a:prstGeom prst="roundRect">
             <a:avLst>
@@ -10715,13 +10566,13 @@
               </a:spcAft>
             </a:pPr>
             <a:r>
-              <a:rPr sz="1350" b="1" i="0">
+              <a:rPr sz="1300" b="1" i="0">
                 <a:solidFill>
                   <a:srgbClr val="A17431"/>
                 </a:solidFill>
                 <a:latin typeface="Arial"/>
               </a:rPr>
-              <a:t>Community forum</a:t>
+              <a:t>Supporting tabs</a:t>
             </a:r>
           </a:p>
           <a:p>
@@ -10737,13 +10588,13 @@
               </a:spcAft>
             </a:pPr>
             <a:r>
-              <a:rPr sz="1150" b="0" i="0">
+              <a:rPr sz="1100" b="0" i="0">
                 <a:solidFill>
                   <a:srgbClr val="2B3A42"/>
                 </a:solidFill>
                 <a:latin typeface="Arial"/>
               </a:rPr>
-              <a:t>Official model and pricing posts plus user tips; the hot posts feed the advice agent.</a:t>
+              <a:t>Forum: official model news plus user posts and tips. Game: a monthly tower-defence season built from tokens already logged. Both are extensions, not the main experience.</a:t>
             </a:r>
           </a:p>
         </p:txBody>
@@ -10756,8 +10607,8 @@
         </p:nvSpPr>
         <p:spPr>
           <a:xfrm>
-            <a:off x="658368" y="3858768"/>
-            <a:ext cx="10874959" cy="786384"/>
+            <a:off x="658368" y="4187952"/>
+            <a:ext cx="10874959" cy="914400"/>
           </a:xfrm>
           <a:prstGeom prst="roundRect">
             <a:avLst>
@@ -10794,7 +10645,7 @@
                 </a:solidFill>
                 <a:latin typeface="Arial"/>
               </a:rPr>
-              <a:t>And an advice agent on that home screen.  </a:t>
+              <a:t>Scope rule.  </a:t>
             </a:r>
             <a:r>
               <a:rPr sz="1300" b="0" i="0">
@@ -10803,7 +10654,7 @@
                 </a:solidFill>
                 <a:latin typeface="Arial"/>
               </a:rPr>
-              <a:t>It reads your logged usage and recent forum posts, then answers questions with the evidence behind them. TokenTrail never runs, routes or controls the coding agents.</a:t>
+              <a:t>API-cost analytics and the home-screen assistant are core; forum and game are supporting extensions. Token Plan and other subscriptions are excluded, and TokenTrail never runs, routes or controls a coding agent.</a:t>
             </a:r>
           </a:p>
         </p:txBody>
@@ -10816,8 +10667,8 @@
         </p:nvSpPr>
         <p:spPr>
           <a:xfrm>
-            <a:off x="658368" y="4864608"/>
-            <a:ext cx="10874959" cy="1188720"/>
+            <a:off x="658368" y="5285232"/>
+            <a:ext cx="10874959" cy="841248"/>
           </a:xfrm>
           <a:prstGeom prst="roundRect">
             <a:avLst>
@@ -10856,7 +10707,7 @@
                 </a:solidFill>
                 <a:latin typeface="Arial"/>
               </a:rPr>
-              <a:t>Scope: API usage priced at public API rates</a:t>
+              <a:t>Estimated, never invoiced</a:t>
             </a:r>
           </a:p>
           <a:p>
@@ -10878,7 +10729,7 @@
                 </a:solidFill>
                 <a:latin typeface="Arial"/>
               </a:rPr>
-              <a:t>Out of scope: ChatGPT and GLM Coding Plan subscriptions, live cross-agent status and system-wide overlays. A response reports tokens for one call, not the agent's whole history, so a call is priced only when a saved rate snapshot covers its date. Every monetary value is an estimate, never an invoiced charge.</a:t>
+              <a:t>An API key alone cannot recover an agent's history, so a call is priced only when a saved rate snapshot covers its date. Missing logs or rates stay visible, and every monetary value is an estimate.</a:t>
             </a:r>
           </a:p>
         </p:txBody>
@@ -11211,7 +11062,7 @@
                 </a:solidFill>
                 <a:latin typeface="Arial"/>
               </a:rPr>
-              <a:t>Codex, Z.ai and DeepSeek bill separately, in their own units, with no cross-provider total and no common price version. A user running three agents has three bills and no single monthly figure.</a:t>
+              <a:t>Codex, ZCode and DSH bill separately, in their own units, with no cross-provider total and no common price version. A user running three agents has three bills and no single monthly figure.</a:t>
             </a:r>
           </a:p>
         </p:txBody>
@@ -11888,7 +11739,7 @@
                 </a:solidFill>
                 <a:latin typeface="Arial"/>
               </a:rPr>
-              <a:t>One of the three providers we track.</a:t>
+              <a:t>The OpenAI-side agent we track.</a:t>
             </a:r>
           </a:p>
         </p:txBody>
@@ -11941,7 +11792,7 @@
                 </a:solidFill>
                 <a:latin typeface="Arial"/>
               </a:rPr>
-              <a:t>FIRST-PARTY AGENT</a:t>
+              <a:t>MODEL PROVIDER</a:t>
             </a:r>
           </a:p>
           <a:p>
@@ -11985,7 +11836,7 @@
                 </a:solidFill>
                 <a:latin typeface="Arial"/>
               </a:rPr>
-              <a:t>Z.ai's coding client. Can use the general Z.ai API endpoint with a key, separate from the Coding Plan.</a:t>
+              <a:t>Supports Xiaomi MiMo as a model provider. Usable MiMo API logs are imported; Token Plan usage is excluded.</a:t>
             </a:r>
           </a:p>
           <a:p>
@@ -12007,7 +11858,7 @@
                 </a:solidFill>
                 <a:latin typeface="Arial"/>
               </a:rPr>
-              <a:t>Tracked through its general API endpoint.</a:t>
+              <a:t>Tracked through its MiMo API endpoint.</a:t>
             </a:r>
           </a:p>
         </p:txBody>
@@ -12060,7 +11911,7 @@
                 </a:solidFill>
                 <a:latin typeface="Arial"/>
               </a:rPr>
-              <a:t>MONITORING PLUGIN</a:t>
+              <a:t>SESSION PLUGIN</a:t>
             </a:r>
           </a:p>
           <a:p>
@@ -12076,13 +11927,13 @@
               </a:spcAft>
             </a:pPr>
             <a:r>
-              <a:rPr sz="1500" b="1" i="0">
+              <a:rPr sz="1300" b="1" i="0">
                 <a:solidFill>
                   <a:srgbClr val="315E75"/>
                 </a:solidFill>
                 <a:latin typeface="Arial"/>
               </a:rPr>
-              <a:t>dsh-context</a:t>
+              <a:t>DSH / dsh-context</a:t>
             </a:r>
           </a:p>
           <a:p>
@@ -12104,7 +11955,7 @@
                 </a:solidFill>
                 <a:latin typeface="Arial"/>
               </a:rPr>
-              <a:t>DeepSeek Harness plugin that shows local sessions, token use, cache behaviour, activity and estimated cost.</a:t>
+              <a:t>DSH runs coding sessions; its dsh-context plugin visualises tokens, cache and activity.</a:t>
             </a:r>
           </a:p>
           <a:p>
@@ -12126,7 +11977,7 @@
                 </a:solidFill>
                 <a:latin typeface="Arial"/>
               </a:rPr>
-              <a:t>Its dashboard is our model for the analytics screen.</a:t>
+              <a:t>Import its logs into Android; no live agent control.</a:t>
             </a:r>
           </a:p>
         </p:txBody>
@@ -12223,7 +12074,7 @@
                 </a:solidFill>
                 <a:latin typeface="Arial"/>
               </a:rPr>
-              <a:t>Open-source proxy with routing, spend tracking and budgets — but only for traffic that goes through it.</a:t>
+              <a:t>Open-source gateway with spend tracking and budgets — but only for traffic that goes through it.</a:t>
             </a:r>
           </a:p>
           <a:p>
@@ -12342,7 +12193,7 @@
                 </a:solidFill>
                 <a:latin typeface="Arial"/>
               </a:rPr>
-              <a:t>Floating pet driven by DSH session events, with touch and feeding actions. Closest thing to a game.</a:t>
+              <a:t>Floating companion driven by DSH session events, with touch and feeding actions. Closest thing to a game.</a:t>
             </a:r>
           </a:p>
           <a:p>
@@ -12364,7 +12215,7 @@
                 </a:solidFill>
                 <a:latin typeface="Arial"/>
               </a:rPr>
-              <a:t>Its entry point inspires our advice agent panel on the home screen.</a:t>
+              <a:t>Its entry point inspires our assistant panel on the home screen.</a:t>
             </a:r>
           </a:p>
         </p:txBody>
@@ -12536,7 +12387,7 @@
                 </a:solidFill>
                 <a:latin typeface="Arial"/>
               </a:rPr>
-              <a:t>Combining the three ideas is what is new:</a:t>
+              <a:t>The outline names three contributions:</a:t>
             </a:r>
           </a:p>
           <a:p>
@@ -12558,7 +12409,7 @@
                 </a:solidFill>
                 <a:latin typeface="Arial"/>
               </a:rPr>
-              <a:t>▪  cross-provider costing from logs the user owns;</a:t>
+              <a:t>▪  unified analytics over logs the user owns;</a:t>
             </a:r>
           </a:p>
           <a:p>
@@ -12580,7 +12431,7 @@
                 </a:solidFill>
                 <a:latin typeface="Arial"/>
               </a:rPr>
-              <a:t>▪  a companion-style monthly progression driven by real spend;</a:t>
+              <a:t>▪  reproducible costs that keep the price version;</a:t>
             </a:r>
           </a:p>
           <a:p>
@@ -12602,7 +12453,7 @@
                 </a:solidFill>
                 <a:latin typeface="Arial"/>
               </a:rPr>
-              <a:t>▪  advice that cites its own evidence and admits missing data.</a:t>
+              <a:t>▪  evidence-based advice that admits missing data.</a:t>
             </a:r>
           </a:p>
         </p:txBody>
@@ -13158,7 +13009,7 @@
                           </a:solidFill>
                           <a:latin typeface="Arial"/>
                         </a:rPr>
-                        <a:t>Can run with an OpenAI API key, billed through the Platform account.</a:t>
+                        <a:t>API-key coding agent billed through OpenAI Platform.</a:t>
                       </a:r>
                     </a:p>
                   </a:txBody>
@@ -13203,7 +13054,7 @@
                           </a:solidFill>
                           <a:latin typeface="Arial"/>
                         </a:rPr>
-                        <a:t>Estimates only logged Codex API calls, using dated OpenAI prices.</a:t>
+                        <a:t>Dated estimates from the available Codex logs.</a:t>
                       </a:r>
                     </a:p>
                   </a:txBody>
@@ -13308,7 +13159,7 @@
                           </a:solidFill>
                           <a:latin typeface="Arial"/>
                         </a:rPr>
-                        <a:t>Can use the general Z.ai API endpoint with an API key, separate from Coding Plan.</a:t>
+                        <a:t>Supports Xiaomi MiMo as a model provider.</a:t>
                       </a:r>
                     </a:p>
                   </a:txBody>
@@ -13353,7 +13204,7 @@
                           </a:solidFill>
                           <a:latin typeface="Arial"/>
                         </a:rPr>
-                        <a:t>Prices logged general-API calls and excludes plan usage.</a:t>
+                        <a:t>Import usable MiMo API logs; exclude Token Plan usage.</a:t>
                       </a:r>
                     </a:p>
                   </a:txBody>
@@ -13407,7 +13258,7 @@
                           <a:latin typeface="Arial"/>
                           <a:hlinkClick r:id="rId4"/>
                         </a:rPr>
-                        <a:t>dsh-context</a:t>
+                        <a:t>DSH / dsh-context</a:t>
                       </a:r>
                     </a:p>
                   </a:txBody>
@@ -13458,7 +13309,7 @@
                           </a:solidFill>
                           <a:latin typeface="Arial"/>
                         </a:rPr>
-                        <a:t>Plugin showing local sessions, token use, cache, activity and estimated costs.</a:t>
+                        <a:t>DSH runs coding sessions; its context plugin visualises tokens, cache and activity.</a:t>
                       </a:r>
                     </a:p>
                   </a:txBody>
@@ -13503,7 +13354,7 @@
                           </a:solidFill>
                           <a:latin typeface="Arial"/>
                         </a:rPr>
-                        <a:t>Spans API providers; session detail appears only when usable logs are imported.</a:t>
+                        <a:t>Import usable DSH logs into Android; no live agent control.</a:t>
                       </a:r>
                     </a:p>
                   </a:txBody>
@@ -13608,7 +13459,7 @@
                           </a:solidFill>
                           <a:latin typeface="Arial"/>
                         </a:rPr>
-                        <a:t>Open-source gateway with routing, spend tracking and budgets for proxied calls.</a:t>
+                        <a:t>Gateway spend tracking and budgets for proxied calls.</a:t>
                       </a:r>
                     </a:p>
                   </a:txBody>
@@ -13653,7 +13504,7 @@
                           </a:solidFill>
                           <a:latin typeface="Arial"/>
                         </a:rPr>
-                        <a:t>Does not proxy traffic; tracks agent-associated API costs from permitted records.</a:t>
+                        <a:t>Imports records without proxying agent traffic.</a:t>
                       </a:r>
                     </a:p>
                   </a:txBody>
@@ -13758,7 +13609,7 @@
                           </a:solidFill>
                           <a:latin typeface="Arial"/>
                         </a:rPr>
-                        <a:t>Interactive floating pet driven by session events, with touch and feeding actions.</a:t>
+                        <a:t>Floating companion driven by DSH session events.</a:t>
                       </a:r>
                     </a:p>
                   </a:txBody>
@@ -13803,7 +13654,7 @@
                           </a:solidFill>
                           <a:latin typeface="Arial"/>
                         </a:rPr>
-                        <a:t>Adds cross-provider, evidence-linked advice, and turns consumption into a visible monthly progression.</a:t>
+                        <a:t>Interactive home-screen assistant with questions and evidence-linked advice.</a:t>
                       </a:r>
                     </a:p>
                   </a:txBody>
@@ -14149,7 +14000,7 @@
         </p:nvGraphicFramePr>
         <p:xfrm>
           <a:off x="658368" y="1481328"/>
-          <a:ext cx="10874959" cy="3931920"/>
+          <a:ext cx="10874959" cy="3127248"/>
         </p:xfrm>
         <a:graphic>
           <a:graphicData uri="http://schemas.openxmlformats.org/drawingml/2006/table">
@@ -14265,7 +14116,7 @@
                   </a:tcPr>
                 </a:tc>
               </a:tr>
-              <a:tr h="877824">
+              <a:tr h="676656">
                 <a:tc>
                   <a:txBody>
                     <a:bodyPr wrap="square"/>
@@ -14340,7 +14191,7 @@
                           </a:solidFill>
                           <a:latin typeface="Arial"/>
                         </a:rPr>
-                        <a:t>Java/XML, Material Components and Navigation; ViewModel/LiveData for state; RecyclerView and MPAndroidChart for trends; a tower-defence game surface and the advice agent panel on the home screen.</a:t>
+                        <a:t>Java/XML, Material Components, Navigation and ViewModel/LiveData; RecyclerView lists, speech-to-text and typed fallback.</a:t>
                       </a:r>
                     </a:p>
                   </a:txBody>
@@ -14369,7 +14220,7 @@
                   </a:tcPr>
                 </a:tc>
               </a:tr>
-              <a:tr h="877824">
+              <a:tr h="676656">
                 <a:tc>
                   <a:txBody>
                     <a:bodyPr wrap="square"/>
@@ -14444,7 +14295,7 @@
                           </a:solidFill>
                           <a:latin typeface="Arial"/>
                         </a:rPr>
-                        <a:t>Retrofit/OkHttp for log import and a Java advice service. The service runs one model API and a bounded function-call loop over read-only usage, budget and comparison tools. WorkManager schedules price checks.</a:t>
+                        <a:t>Retrofit/OkHttp connects the Java advice service; bounded read-only tools and one model API. WorkManager checks prices.</a:t>
                       </a:r>
                     </a:p>
                   </a:txBody>
@@ -14473,7 +14324,7 @@
                   </a:tcPr>
                 </a:tc>
               </a:tr>
-              <a:tr h="877824">
+              <a:tr h="676656">
                 <a:tc>
                   <a:txBody>
                     <a:bodyPr wrap="square"/>
@@ -14548,7 +14399,7 @@
                           </a:solidFill>
                           <a:latin typeface="Arial"/>
                         </a:rPr>
-                        <a:t>Room plus UID-restricted Firestore; the Java service verifies Firebase ID tokens and holds its model key server-side. Coding-agent passwords and keys are never required.</a:t>
+                        <a:t>Room stores usage, prices and history; the team's own server supports sync and public posts. The service authenticates every request and scopes every read to the caller's account; no client holds a model key.</a:t>
                       </a:r>
                     </a:p>
                   </a:txBody>
@@ -14577,7 +14428,7 @@
                   </a:tcPr>
                 </a:tc>
               </a:tr>
-              <a:tr h="877824">
+              <a:tr h="676656">
                 <a:tc>
                   <a:txBody>
                     <a:bodyPr wrap="square"/>
@@ -14653,7 +14504,7 @@
                           <a:latin typeface="Arial"/>
                           <a:hlinkClick r:id="rId2"/>
                         </a:rPr>
-                        <a:t>Room with a View</a:t>
+                        <a:t>Room</a:t>
                       </a:r>
                       <a:r>
                         <a:rPr sz="1050" b="0" i="0">
@@ -14662,7 +14513,7 @@
                           </a:solidFill>
                           <a:latin typeface="Arial"/>
                         </a:rPr>
-                        <a:t> guides storage; </a:t>
+                        <a:t> (Apache-2.0) for local records; </a:t>
                       </a:r>
                       <a:r>
                         <a:rPr sz="1050" b="0" i="0" u="none">
@@ -14681,7 +14532,26 @@
                           </a:solidFill>
                           <a:latin typeface="Arial"/>
                         </a:rPr>
-                        <a:t> may supply charts; an open-source tower-defence sample may supply the wave and placement loop; dsh-pet inspires the agent's entry point.</a:t>
+                        <a:t> (Apache-2.0) for charts, added as a dependency; </a:t>
+                      </a:r>
+                      <a:r>
+                        <a:rPr sz="1050" b="0" i="0" u="none">
+                          <a:solidFill>
+                            <a:srgbClr val="2E766E"/>
+                          </a:solidFill>
+                          <a:latin typeface="Arial"/>
+                          <a:hlinkClick r:id="rId4"/>
+                        </a:rPr>
+                        <a:t>Room with a View</a:t>
+                      </a:r>
+                      <a:r>
+                        <a:rPr sz="1050" b="0" i="0">
+                          <a:solidFill>
+                            <a:srgbClr val="2B3A42"/>
+                          </a:solidFill>
+                          <a:latin typeface="Arial"/>
+                        </a:rPr>
+                        <a:t> is an archived architecture reference with no copied code. dsh-context/LiteLLM: comparison only; dsh-pet: entry inspiration only. The game engine is original.</a:t>
                       </a:r>
                     </a:p>
                   </a:txBody>
@@ -14722,8 +14592,8 @@
         </p:nvSpPr>
         <p:spPr>
           <a:xfrm>
-            <a:off x="658368" y="5504688"/>
-            <a:ext cx="10874959" cy="621792"/>
+            <a:off x="658368" y="4718304"/>
+            <a:ext cx="10874959" cy="713232"/>
           </a:xfrm>
           <a:prstGeom prst="roundRect">
             <a:avLst>
@@ -14762,7 +14632,52 @@
                 </a:solidFill>
                 <a:latin typeface="Arial"/>
               </a:rPr>
-              <a:t>Original or properly licensed art only. Every reused file and its licence is recorded in the repository, and this layer is revisited if a dependency changes the plan.</a:t>
+              <a:t>Original or properly licensed art only. Every reused file and its licence, version and source is recorded in the repository, and this layer is revisited if a dependency changes the plan.</a:t>
+            </a:r>
+          </a:p>
+        </p:txBody>
+      </p:sp>
+      <p:sp>
+        <p:nvSpPr>
+          <p:cNvPr id="10" name="TextBox 9"/>
+          <p:cNvSpPr txBox="1"/>
+          <p:nvPr/>
+        </p:nvSpPr>
+        <p:spPr>
+          <a:xfrm>
+            <a:off x="658368" y="5577840"/>
+            <a:ext cx="10874959" cy="365760"/>
+          </a:xfrm>
+          <a:prstGeom prst="rect">
+            <a:avLst/>
+          </a:prstGeom>
+          <a:noFill/>
+        </p:spPr>
+        <p:txBody>
+          <a:bodyPr wrap="square" anchor="t" lIns="0" rIns="0" tIns="0" bIns="0">
+            <a:spAutoFit/>
+          </a:bodyPr>
+          <a:lstStyle/>
+          <a:p>
+            <a:pPr algn="l">
+              <a:lnSpc>
+                <a:spcPct val="116000"/>
+              </a:lnSpc>
+              <a:spcBef>
+                <a:spcPts val="0"/>
+              </a:spcBef>
+              <a:spcAft>
+                <a:spcPts val="0"/>
+              </a:spcAft>
+            </a:pPr>
+            <a:r>
+              <a:rPr sz="1050" b="0" i="0">
+                <a:solidFill>
+                  <a:srgbClr val="7A8C94"/>
+                </a:solidFill>
+                <a:latin typeface="Arial"/>
+              </a:rPr>
+              <a:t>Section 8 of the written outline lists the same four layers, with a licence link for each reused library.</a:t>
             </a:r>
           </a:p>
         </p:txBody>
@@ -14990,7 +14905,7 @@
                 </a:solidFill>
                 <a:latin typeface="Arial"/>
               </a:rPr>
-              <a:t>Four contributions, and the rule that keeps them honest</a:t>
+              <a:t>Three contributions, and the rule that keeps them honest</a:t>
             </a:r>
           </a:p>
         </p:txBody>
@@ -15033,8 +14948,8 @@
         </p:nvSpPr>
         <p:spPr>
           <a:xfrm>
-            <a:off x="658368" y="1536192"/>
-            <a:ext cx="5309463" cy="1645920"/>
+            <a:off x="658368" y="1554480"/>
+            <a:ext cx="3466490" cy="2139696"/>
           </a:xfrm>
           <a:prstGeom prst="roundRect">
             <a:avLst>
@@ -15052,7 +14967,7 @@
           <a:effectLst/>
         </p:spPr>
         <p:txBody>
-          <a:bodyPr rtlCol="0" anchor="t" wrap="square" lIns="155448" rIns="155448" tIns="124358" bIns="124358"/>
+          <a:bodyPr rtlCol="0" anchor="t" wrap="square" lIns="146304" rIns="146304" tIns="117043" bIns="117043"/>
           <a:lstStyle/>
           <a:p>
             <a:pPr algn="l">
@@ -15067,13 +14982,13 @@
               </a:spcAft>
             </a:pPr>
             <a:r>
-              <a:rPr sz="1400" b="1" i="0">
+              <a:rPr sz="1350" b="1" i="0">
                 <a:solidFill>
                   <a:srgbClr val="315E75"/>
                 </a:solidFill>
                 <a:latin typeface="Arial"/>
               </a:rPr>
-              <a:t>Unified view</a:t>
+              <a:t>Unified analytics</a:t>
             </a:r>
           </a:p>
           <a:p>
@@ -15089,13 +15004,13 @@
               </a:spcAft>
             </a:pPr>
             <a:r>
-              <a:rPr sz="1150" b="0" i="0">
+              <a:rPr sz="1100" b="0" i="0">
                 <a:solidFill>
                   <a:srgbClr val="2B3A42"/>
                 </a:solidFill>
                 <a:latin typeface="Arial"/>
               </a:rPr>
-              <a:t>Merges authorised API-call logs from Codex, ZCode and a DeepSeek-side tool, removes duplicate records, and shows source and coverage on every figure.</a:t>
+              <a:t>De-duplicates authorised logs and shows source, coverage and session detail — but only where the records support it.</a:t>
             </a:r>
           </a:p>
           <a:p>
@@ -15111,13 +15026,13 @@
               </a:spcAft>
             </a:pPr>
             <a:r>
-              <a:rPr sz="1150" b="0" i="0">
+              <a:rPr sz="1100" b="0" i="0">
                 <a:solidFill>
                   <a:srgbClr val="2B3A42"/>
                 </a:solidFill>
                 <a:latin typeface="Arial"/>
               </a:rPr>
-              <a:t>Where the records do not support a session view, the app shows a provider-level estimate instead of inventing one.</a:t>
+              <a:t>Where a session view is not supported, it shows a provider-level estimate instead of inventing one.</a:t>
             </a:r>
           </a:p>
         </p:txBody>
@@ -15130,8 +15045,8 @@
         </p:nvSpPr>
         <p:spPr>
           <a:xfrm>
-            <a:off x="6223863" y="1536192"/>
-            <a:ext cx="5309463" cy="1645920"/>
+            <a:off x="4362602" y="1554480"/>
+            <a:ext cx="3466490" cy="2139696"/>
           </a:xfrm>
           <a:prstGeom prst="roundRect">
             <a:avLst>
@@ -15149,7 +15064,7 @@
           <a:effectLst/>
         </p:spPr>
         <p:txBody>
-          <a:bodyPr rtlCol="0" anchor="t" wrap="square" lIns="155448" rIns="155448" tIns="124358" bIns="124358"/>
+          <a:bodyPr rtlCol="0" anchor="t" wrap="square" lIns="146304" rIns="146304" tIns="117043" bIns="117043"/>
           <a:lstStyle/>
           <a:p>
             <a:pPr algn="l">
@@ -15164,7 +15079,7 @@
               </a:spcAft>
             </a:pPr>
             <a:r>
-              <a:rPr sz="1400" b="1" i="0">
+              <a:rPr sz="1350" b="1" i="0">
                 <a:solidFill>
                   <a:srgbClr val="2E766E"/>
                 </a:solidFill>
@@ -15186,13 +15101,13 @@
               </a:spcAft>
             </a:pPr>
             <a:r>
-              <a:rPr sz="1150" b="0" i="0">
+              <a:rPr sz="1100" b="0" i="0">
                 <a:solidFill>
                   <a:srgbClr val="2B3A42"/>
                 </a:solidFill>
                 <a:latin typeface="Arial"/>
               </a:rPr>
-              <a:t>Java applies dated official rates by provider, model, token class and service tier, and keeps the price version behind each estimate.</a:t>
+              <a:t>Java applies dated official rates by provider, model, token class and service tier, and keeps the price version behind every estimate.</a:t>
             </a:r>
           </a:p>
           <a:p>
@@ -15208,13 +15123,13 @@
               </a:spcAft>
             </a:pPr>
             <a:r>
-              <a:rPr sz="1150" b="0" i="0">
+              <a:rPr sz="1100" b="0" i="0">
                 <a:solidFill>
                   <a:srgbClr val="2B3A42"/>
                 </a:solidFill>
                 <a:latin typeface="Arial"/>
               </a:rPr>
-              <a:t>New rates apply prospectively; old estimates keep the version they were calculated with.</a:t>
+              <a:t>New rates apply prospectively; old estimates keep the version they were computed with.</a:t>
             </a:r>
           </a:p>
         </p:txBody>
@@ -15227,8 +15142,8 @@
         </p:nvSpPr>
         <p:spPr>
           <a:xfrm>
-            <a:off x="658368" y="3383280"/>
-            <a:ext cx="5309463" cy="1645920"/>
+            <a:off x="8066836" y="1554480"/>
+            <a:ext cx="3466490" cy="2139696"/>
           </a:xfrm>
           <a:prstGeom prst="roundRect">
             <a:avLst>
@@ -15246,7 +15161,7 @@
           <a:effectLst/>
         </p:spPr>
         <p:txBody>
-          <a:bodyPr rtlCol="0" anchor="t" wrap="square" lIns="155448" rIns="155448" tIns="124358" bIns="124358"/>
+          <a:bodyPr rtlCol="0" anchor="t" wrap="square" lIns="146304" rIns="146304" tIns="117043" bIns="117043"/>
           <a:lstStyle/>
           <a:p>
             <a:pPr algn="l">
@@ -15261,13 +15176,13 @@
               </a:spcAft>
             </a:pPr>
             <a:r>
-              <a:rPr sz="1400" b="1" i="0">
+              <a:rPr sz="1350" b="1" i="0">
                 <a:solidFill>
                   <a:srgbClr val="A17431"/>
                 </a:solidFill>
                 <a:latin typeface="Arial"/>
               </a:rPr>
-              <a:t>Reflected progress</a:t>
+              <a:t>Evidence-based AI advice</a:t>
             </a:r>
           </a:p>
           <a:p>
@@ -15283,13 +15198,13 @@
               </a:spcAft>
             </a:pPr>
             <a:r>
-              <a:rPr sz="1150" b="0" i="0">
+              <a:rPr sz="1100" b="0" i="0">
                 <a:solidFill>
                   <a:srgbClr val="2B3A42"/>
                 </a:solidFill>
                 <a:latin typeface="Arial"/>
               </a:rPr>
-              <a:t>Tokens already spent on real work convert into building resources in a monthly tower-defence game — a visible result without asking anyone to spend differently.</a:t>
+              <a:t>Text or speech questions obtain calculated evidence from read-only tools; replies disclose sample size and missing data.</a:t>
             </a:r>
           </a:p>
           <a:p>
@@ -15305,13 +15220,13 @@
               </a:spcAft>
             </a:pPr>
             <a:r>
-              <a:rPr sz="1150" b="0" i="0">
+              <a:rPr sz="1100" b="0" i="0">
                 <a:solidFill>
                   <a:srgbClr val="2B3A42"/>
                 </a:solidFill>
                 <a:latin typeface="Arial"/>
               </a:rPr>
-              <a:t>The season resets each month, matching the billing cycle AI subscriptions already follow.</a:t>
+              <a:t>It compares recorded cost, tokens and cache use — never answer quality, and it asks for no task ratings.</a:t>
             </a:r>
           </a:p>
         </p:txBody>
@@ -15324,105 +15239,8 @@
         </p:nvSpPr>
         <p:spPr>
           <a:xfrm>
-            <a:off x="6223863" y="3383280"/>
-            <a:ext cx="5309463" cy="1645920"/>
-          </a:xfrm>
-          <a:prstGeom prst="roundRect">
-            <a:avLst>
-              <a:gd name="adj" fmla="val 6000"/>
-            </a:avLst>
-          </a:prstGeom>
-          <a:solidFill>
-            <a:srgbClr val="EAF3F7"/>
-          </a:solidFill>
-          <a:ln w="9525">
-            <a:solidFill>
-              <a:srgbClr val="BDD0D8"/>
-            </a:solidFill>
-          </a:ln>
-          <a:effectLst/>
-        </p:spPr>
-        <p:txBody>
-          <a:bodyPr rtlCol="0" anchor="t" wrap="square" lIns="155448" rIns="155448" tIns="124358" bIns="124358"/>
-          <a:lstStyle/>
-          <a:p>
-            <a:pPr algn="l">
-              <a:lnSpc>
-                <a:spcPct val="116000"/>
-              </a:lnSpc>
-              <a:spcBef>
-                <a:spcPts val="0"/>
-              </a:spcBef>
-              <a:spcAft>
-                <a:spcPts val="300"/>
-              </a:spcAft>
-            </a:pPr>
-            <a:r>
-              <a:rPr sz="1400" b="1" i="0">
-                <a:solidFill>
-                  <a:srgbClr val="315E75"/>
-                </a:solidFill>
-                <a:latin typeface="Arial"/>
-              </a:rPr>
-              <a:t>Decision support</a:t>
-            </a:r>
-          </a:p>
-          <a:p>
-            <a:pPr algn="l">
-              <a:lnSpc>
-                <a:spcPct val="114000"/>
-              </a:lnSpc>
-              <a:spcBef>
-                <a:spcPts val="0"/>
-              </a:spcBef>
-              <a:spcAft>
-                <a:spcPts val="500"/>
-              </a:spcAft>
-            </a:pPr>
-            <a:r>
-              <a:rPr sz="1150" b="0" i="0">
-                <a:solidFill>
-                  <a:srgbClr val="2B3A42"/>
-                </a:solidFill>
-                <a:latin typeface="Arial"/>
-              </a:rPr>
-              <a:t>Compares agents on computed measures only: logged token counts, dated rates, cache behaviour and duration. The advice agent supplies evidence, and states sample size and missing data.</a:t>
-            </a:r>
-          </a:p>
-          <a:p>
-            <a:pPr algn="l">
-              <a:lnSpc>
-                <a:spcPct val="114000"/>
-              </a:lnSpc>
-              <a:spcBef>
-                <a:spcPts val="0"/>
-              </a:spcBef>
-              <a:spcAft>
-                <a:spcPts val="0"/>
-              </a:spcAft>
-            </a:pPr>
-            <a:r>
-              <a:rPr sz="1150" b="0" i="0">
-                <a:solidFill>
-                  <a:srgbClr val="2B3A42"/>
-                </a:solidFill>
-                <a:latin typeface="Arial"/>
-              </a:rPr>
-              <a:t>No task ratings anywhere — the analysis costs the user no extra input, and never judges how good an answer was.</a:t>
-            </a:r>
-          </a:p>
-        </p:txBody>
-      </p:sp>
-      <p:sp>
-        <p:nvSpPr>
-          <p:cNvPr id="12" name="Rounded Rectangle 11"/>
-          <p:cNvSpPr/>
-          <p:nvPr/>
-        </p:nvSpPr>
-        <p:spPr>
-          <a:xfrm>
-            <a:off x="658368" y="5230368"/>
-            <a:ext cx="10874959" cy="749808"/>
+            <a:off x="658368" y="3931920"/>
+            <a:ext cx="10874959" cy="932688"/>
           </a:xfrm>
           <a:prstGeom prst="roundRect">
             <a:avLst>
@@ -15445,7 +15263,61 @@
           <a:p>
             <a:pPr algn="l">
               <a:lnSpc>
-                <a:spcPct val="112000"/>
+                <a:spcPct val="114000"/>
+              </a:lnSpc>
+              <a:spcBef>
+                <a:spcPts val="0"/>
+              </a:spcBef>
+              <a:spcAft>
+                <a:spcPts val="0"/>
+              </a:spcAft>
+            </a:pPr>
+            <a:r>
+              <a:rPr sz="1200" b="1" i="0">
+                <a:solidFill>
+                  <a:srgbClr val="A17431"/>
+                </a:solidFill>
+                <a:latin typeface="Arial"/>
+              </a:rPr>
+              <a:t>Scope rule:  </a:t>
+            </a:r>
+            <a:r>
+              <a:rPr sz="1200" b="0" i="0">
+                <a:solidFill>
+                  <a:srgbClr val="2B3A42"/>
+                </a:solidFill>
+                <a:latin typeface="Arial"/>
+              </a:rPr>
+              <a:t>API-cost analytics and the home-screen assistant are core; forum and game are supporting extensions. Live cross-agent status and system-wide overlays are outside the first release.</a:t>
+            </a:r>
+          </a:p>
+        </p:txBody>
+      </p:sp>
+      <p:sp>
+        <p:nvSpPr>
+          <p:cNvPr id="12" name="TextBox 11"/>
+          <p:cNvSpPr txBox="1"/>
+          <p:nvPr/>
+        </p:nvSpPr>
+        <p:spPr>
+          <a:xfrm>
+            <a:off x="658368" y="5065776"/>
+            <a:ext cx="10874959" cy="685800"/>
+          </a:xfrm>
+          <a:prstGeom prst="rect">
+            <a:avLst/>
+          </a:prstGeom>
+          <a:noFill/>
+        </p:spPr>
+        <p:txBody>
+          <a:bodyPr wrap="square" anchor="t" lIns="0" rIns="0" tIns="0" bIns="0">
+            <a:spAutoFit/>
+          </a:bodyPr>
+          <a:lstStyle/>
+          <a:p>
+            <a:pPr algn="l">
+              <a:lnSpc>
+                <a:spcPct val="116000"/>
               </a:lnSpc>
               <a:spcBef>
                 <a:spcPts val="0"/>
@@ -15457,11 +15329,11 @@
             <a:r>
               <a:rPr sz="1150" b="1" i="0">
                 <a:solidFill>
-                  <a:srgbClr val="A17431"/>
-                </a:solidFill>
-                <a:latin typeface="Arial"/>
-              </a:rPr>
-              <a:t>Scope rule:  </a:t>
+                  <a:srgbClr val="315E75"/>
+                </a:solidFill>
+                <a:latin typeface="Arial"/>
+              </a:rPr>
+              <a:t>Values are labelled.  </a:t>
             </a:r>
             <a:r>
               <a:rPr sz="1150" b="0" i="0">
@@ -15470,7 +15342,7 @@
                 </a:solidFill>
                 <a:latin typeface="Arial"/>
               </a:rPr>
-              <a:t>statistics are the app's main purpose. Three core parts — the API-cost analytics home screen, the monthly tower-defence game and the community forum. The advice agent can recommend but cannot execute coding agents or enforce a hard cap.</a:t>
+              <a:t>Every monetary figure is Estimated, Partial estimate or Unavailable — a cost that cannot be computed is never shown as zero. Source-billed amounts are kept as separate reconciliation evidence, not as replacements for the estimates.</a:t>
             </a:r>
           </a:p>
         </p:txBody>
@@ -15653,7 +15525,7 @@
                 </a:solidFill>
                 <a:latin typeface="Arial"/>
               </a:rPr>
-              <a:t>5 · NEW FEATURE A</a:t>
+              <a:t>5 · SUPPORTING FEATURE A</a:t>
             </a:r>
           </a:p>
         </p:txBody>
@@ -15698,7 +15570,7 @@
                 </a:solidFill>
                 <a:latin typeface="Arial"/>
               </a:rPr>
-              <a:t>A monthly tower-defence season built from tokens already spent</a:t>
+              <a:t>A monthly tower-defence season built from tokens already logged</a:t>
             </a:r>
           </a:p>
         </p:txBody>
@@ -15806,7 +15678,7 @@
                 </a:solidFill>
                 <a:latin typeface="Arial"/>
               </a:rPr>
-              <a:t>It has its own tab.  </a:t>
+              <a:t>It is a supporting tab.  </a:t>
             </a:r>
             <a:r>
               <a:rPr sz="1250" b="0" i="0">
@@ -15815,7 +15687,7 @@
                 </a:solidFill>
                 <a:latin typeface="Arial"/>
               </a:rPr>
-              <a:t>Reached from the bottom bar. It is played in monthly seasons that match the billing cycle AI subscriptions already follow.</a:t>
+              <a:t>Reached from the bottom bar, beside the forum. It is played in monthly seasons that match the billing cycle the provider subscriptions already follow.</a:t>
             </a:r>
           </a:p>
           <a:p>
@@ -15855,7 +15727,7 @@
                 </a:solidFill>
                 <a:latin typeface="Arial"/>
               </a:rPr>
-              <a:t>Tokens already spent convert into building resources at a fixed rate per million tokens.</a:t>
+              <a:t>Input, cache and output tokens already logged convert into separate resource pools at a fixed rate per million tokens.</a:t>
             </a:r>
           </a:p>
           <a:p>
@@ -15895,7 +15767,7 @@
                 </a:solidFill>
                 <a:latin typeface="Arial"/>
               </a:rPr>
-              <a:t>Defences and wall segments are placed and upgraded by hand on a build grid around the data-centre core, which expands in one direction.</a:t>
+              <a:t>Towers and wall segments are placed and upgraded by hand on a build grid around the data-centre core, which expands in one direction.</a:t>
             </a:r>
           </a:p>
           <a:p>
@@ -16006,7 +15878,7 @@
                 </a:solidFill>
                 <a:latin typeface="Arial"/>
               </a:rPr>
-              <a:t>A day of agent work leaves a visible result without asking the user to spend differently, and the resource balance is unreachable without logged usage — so the game cannot be played on invented data.</a:t>
+              <a:t>A day of agent work leaves a visible result without asking the user to spend differently. Playing never changes usage, cost or budget totals, and re-importing the same logs grants no duplicate resources — so the balance cannot be reached on invented data.</a:t>
             </a:r>
           </a:p>
         </p:txBody>

--- a/docs/TokenTrail_Project_Outline_Slides.pptx
+++ b/docs/TokenTrail_Project_Outline_Slides.pptx
@@ -4054,7 +4054,7 @@
                 </a:solidFill>
                 <a:latin typeface="Arial"/>
               </a:rPr>
-              <a:t>It can recommend but cannot run, route or interrupt a coding agent, and cannot enforce a hard spending cap. It compares cost and token use, never answer quality.</a:t>
+              <a:t>It can recommend but cannot run or interrupt a coding agent, and cannot enforce a hard spending cap. It compares cost and token use, never answer quality.</a:t>
             </a:r>
           </a:p>
         </p:txBody>
@@ -4561,7 +4561,7 @@
                 </a:solidFill>
                 <a:latin typeface="Arial"/>
               </a:rPr>
-              <a:t>Room holds local records. The server-side store holds user sync, budgets, game state and the assistant ledger; public posts are separate.</a:t>
+              <a:t>The server-side store is authoritative: usage days, resource balances and settlement for the account; public posts are separate. Room keeps only a local cache.</a:t>
             </a:r>
           </a:p>
         </p:txBody>
@@ -8479,7 +8479,7 @@
                 </a:solidFill>
                 <a:latin typeface="Arial"/>
               </a:rPr>
-              <a:t>The tower-defence engine and UI, resource settlement, monthly state, placement and upgrades, and enemy waves.</a:t>
+              <a:t>The tower-defence engine and UI, resource settlement on the server, monthly state, placement and upgrades, and enemy waves.</a:t>
             </a:r>
           </a:p>
         </p:txBody>
@@ -10654,7 +10654,7 @@
                 </a:solidFill>
                 <a:latin typeface="Arial"/>
               </a:rPr>
-              <a:t>API-cost analytics and the home-screen assistant are core; forum and game are supporting extensions. Token Plan and other subscriptions are excluded, and TokenTrail never runs, routes or controls a coding agent.</a:t>
+              <a:t>API-cost analytics and the home-screen assistant are core; forum and game are supporting extensions. Token Plan and other subscriptions are excluded, and TokenTrail never runs or controls a coding agent.</a:t>
             </a:r>
           </a:p>
         </p:txBody>
@@ -12312,7 +12312,7 @@
                 </a:solidFill>
                 <a:latin typeface="Arial"/>
               </a:rPr>
-              <a:t>The review also set our boundaries: no proxying, no subscription quotas, and no overlay on another app.</a:t>
+              <a:t>The review also set our boundaries: no subscription quotas, and no overlay on another app. An optional relay, off by default, reads the token classes exports omit.</a:t>
             </a:r>
           </a:p>
         </p:txBody>
@@ -13504,7 +13504,7 @@
                           </a:solidFill>
                           <a:latin typeface="Arial"/>
                         </a:rPr>
-                        <a:t>Imports records without proxying agent traffic.</a:t>
+                        <a:t>Optional relay as a record source only; no gateway or protocol translation.</a:t>
                       </a:r>
                     </a:p>
                   </a:txBody>
@@ -14399,7 +14399,7 @@
                           </a:solidFill>
                           <a:latin typeface="Arial"/>
                         </a:rPr>
-                        <a:t>Room stores usage, prices and history; the team's own server supports sync and public posts. The service authenticates every request and scopes every read to the caller's account; no client holds a model key.</a:t>
+                        <a:t>The team's own server is authoritative: accounts, usage days, resource balance and settlement, sync, public posts and an optional relay; Room is a local cache. One app account is the single identity, and the relay key is a transport credential that only the relay path accepts; no client holds a model key.</a:t>
                       </a:r>
                     </a:p>
                   </a:txBody>
@@ -15847,7 +15847,7 @@
                 </a:solidFill>
                 <a:latin typeface="Arial"/>
               </a:rPr>
-              <a:t>Waves run in real time, so no offline simulation and no scheduled settlement is needed. The season resets each month.</a:t>
+              <a:t>Waves run in real time, so no offline simulation is needed. The season resets each month, and the server settles each completed day once.</a:t>
             </a:r>
           </a:p>
           <a:p>
